--- a/lab_09_Solovyev_project/презентация.pptx
+++ b/lab_09_Solovyev_project/презентация.pptx
@@ -5,7 +5,7 @@
     <p:sldMasterId id="2147483679" r:id="rId1"/>
   </p:sldMasterIdLst>
   <p:notesMasterIdLst>
-    <p:notesMasterId r:id="rId21"/>
+    <p:notesMasterId r:id="rId22"/>
   </p:notesMasterIdLst>
   <p:sldIdLst>
     <p:sldId id="256" r:id="rId2"/>
@@ -17,33 +17,34 @@
     <p:sldId id="287" r:id="rId8"/>
     <p:sldId id="289" r:id="rId9"/>
     <p:sldId id="288" r:id="rId10"/>
-    <p:sldId id="305" r:id="rId11"/>
-    <p:sldId id="290" r:id="rId12"/>
-    <p:sldId id="291" r:id="rId13"/>
-    <p:sldId id="295" r:id="rId14"/>
-    <p:sldId id="296" r:id="rId15"/>
-    <p:sldId id="297" r:id="rId16"/>
+    <p:sldId id="290" r:id="rId11"/>
+    <p:sldId id="291" r:id="rId12"/>
+    <p:sldId id="295" r:id="rId13"/>
+    <p:sldId id="296" r:id="rId14"/>
+    <p:sldId id="297" r:id="rId15"/>
+    <p:sldId id="306" r:id="rId16"/>
     <p:sldId id="298" r:id="rId17"/>
     <p:sldId id="299" r:id="rId18"/>
-    <p:sldId id="302" r:id="rId19"/>
-    <p:sldId id="304" r:id="rId20"/>
+    <p:sldId id="307" r:id="rId19"/>
+    <p:sldId id="302" r:id="rId20"/>
+    <p:sldId id="304" r:id="rId21"/>
   </p:sldIdLst>
   <p:sldSz cx="9144000" cy="5143500" type="screen16x9"/>
   <p:notesSz cx="6797675" cy="9928225"/>
   <p:embeddedFontLst>
     <p:embeddedFont>
       <p:font typeface="Roboto" panose="020B0604020202020204" charset="0"/>
-      <p:regular r:id="rId22"/>
-      <p:bold r:id="rId23"/>
-      <p:italic r:id="rId24"/>
-      <p:boldItalic r:id="rId25"/>
+      <p:regular r:id="rId23"/>
+      <p:bold r:id="rId24"/>
+      <p:italic r:id="rId25"/>
+      <p:boldItalic r:id="rId26"/>
     </p:embeddedFont>
     <p:embeddedFont>
       <p:font typeface="Roboto Medium" panose="020B0604020202020204" charset="0"/>
-      <p:regular r:id="rId26"/>
-      <p:bold r:id="rId27"/>
-      <p:italic r:id="rId28"/>
-      <p:boldItalic r:id="rId29"/>
+      <p:regular r:id="rId27"/>
+      <p:bold r:id="rId28"/>
+      <p:italic r:id="rId29"/>
+      <p:boldItalic r:id="rId30"/>
     </p:embeddedFont>
   </p:embeddedFontLst>
   <p:defaultTextStyle>
@@ -876,17 +877,11 @@
 </file>
 
 <file path=ppt/notesSlides/notesSlide10.xml><?xml version="1.0" encoding="utf-8"?>
-<p:notes xmlns:a="http://schemas.openxmlformats.org/drawingml/2006/main" xmlns:r="http://schemas.openxmlformats.org/officeDocument/2006/relationships" xmlns:p="http://schemas.openxmlformats.org/presentationml/2006/main" showMasterSp="0" showMasterPhAnim="0">
+<p:notes xmlns:a="http://schemas.openxmlformats.org/drawingml/2006/main" xmlns:r="http://schemas.openxmlformats.org/officeDocument/2006/relationships" xmlns:p="http://schemas.openxmlformats.org/presentationml/2006/main">
   <p:cSld>
     <p:spTree>
       <p:nvGrpSpPr>
-        <p:cNvPr id="1" name="Shape 200">
-          <a:extLst>
-            <a:ext uri="{FF2B5EF4-FFF2-40B4-BE49-F238E27FC236}">
-              <a16:creationId xmlns:a16="http://schemas.microsoft.com/office/drawing/2014/main" id="{06B6FEB2-87F5-E596-6C2C-691588F75F41}"/>
-            </a:ext>
-          </a:extLst>
-        </p:cNvPr>
+        <p:cNvPr id="1" name=""/>
         <p:cNvGrpSpPr/>
         <p:nvPr/>
       </p:nvGrpSpPr>
@@ -900,99 +895,39 @@
       </p:grpSpPr>
       <p:sp>
         <p:nvSpPr>
-          <p:cNvPr id="201" name="Google Shape;201;gdf29b9fb24_0_69:notes">
-            <a:extLst>
-              <a:ext uri="{FF2B5EF4-FFF2-40B4-BE49-F238E27FC236}">
-                <a16:creationId xmlns:a16="http://schemas.microsoft.com/office/drawing/2014/main" id="{7B4C66A1-5B40-5EED-DA82-FBC0AB8D63EF}"/>
-              </a:ext>
-            </a:extLst>
-          </p:cNvPr>
+          <p:cNvPr id="2" name="Образ слайда 1"/>
           <p:cNvSpPr>
             <a:spLocks noGrp="1" noRot="1" noChangeAspect="1"/>
           </p:cNvSpPr>
           <p:nvPr>
-            <p:ph type="sldImg" idx="2"/>
+            <p:ph type="sldImg"/>
           </p:nvPr>
         </p:nvSpPr>
-        <p:spPr>
-          <a:xfrm>
-            <a:off x="90488" y="744538"/>
-            <a:ext cx="6616700" cy="3722687"/>
-          </a:xfrm>
-          <a:custGeom>
-            <a:avLst/>
-            <a:gdLst/>
-            <a:ahLst/>
-            <a:cxnLst/>
-            <a:rect l="l" t="t" r="r" b="b"/>
-            <a:pathLst>
-              <a:path w="120000" h="120000" extrusionOk="0">
-                <a:moveTo>
-                  <a:pt x="0" y="0"/>
-                </a:moveTo>
-                <a:lnTo>
-                  <a:pt x="120000" y="0"/>
-                </a:lnTo>
-                <a:lnTo>
-                  <a:pt x="120000" y="120000"/>
-                </a:lnTo>
-                <a:lnTo>
-                  <a:pt x="0" y="120000"/>
-                </a:lnTo>
-                <a:close/>
-              </a:path>
-            </a:pathLst>
-          </a:custGeom>
-        </p:spPr>
+        <p:spPr/>
       </p:sp>
       <p:sp>
         <p:nvSpPr>
-          <p:cNvPr id="202" name="Google Shape;202;gdf29b9fb24_0_69:notes">
-            <a:extLst>
-              <a:ext uri="{FF2B5EF4-FFF2-40B4-BE49-F238E27FC236}">
-                <a16:creationId xmlns:a16="http://schemas.microsoft.com/office/drawing/2014/main" id="{8BD06824-F64C-7907-EC6A-7404DFEEA198}"/>
-              </a:ext>
-            </a:extLst>
-          </p:cNvPr>
-          <p:cNvSpPr txBox="1">
+          <p:cNvPr id="3" name="Заметки 2"/>
+          <p:cNvSpPr>
             <a:spLocks noGrp="1"/>
           </p:cNvSpPr>
           <p:nvPr>
             <p:ph type="body" idx="1"/>
           </p:nvPr>
         </p:nvSpPr>
-        <p:spPr>
-          <a:xfrm>
-            <a:off x="679768" y="4715907"/>
-            <a:ext cx="5438140" cy="4467701"/>
-          </a:xfrm>
-          <a:prstGeom prst="rect">
-            <a:avLst/>
-          </a:prstGeom>
-        </p:spPr>
+        <p:spPr/>
         <p:txBody>
-          <a:bodyPr spcFirstLastPara="1" wrap="square" lIns="91425" tIns="91425" rIns="91425" bIns="91425" anchor="t" anchorCtr="0">
-            <a:noAutofit/>
-          </a:bodyPr>
+          <a:bodyPr/>
           <a:lstStyle/>
           <a:p>
-            <a:pPr marL="0" lvl="0" indent="0" algn="l" rtl="0">
-              <a:spcBef>
-                <a:spcPts val="0"/>
-              </a:spcBef>
-              <a:spcAft>
-                <a:spcPts val="0"/>
-              </a:spcAft>
-              <a:buNone/>
-            </a:pPr>
-            <a:endParaRPr dirty="0"/>
+            <a:endParaRPr lang="ru-RU" dirty="0"/>
           </a:p>
         </p:txBody>
       </p:sp>
     </p:spTree>
     <p:extLst>
       <p:ext uri="{BB962C8B-B14F-4D97-AF65-F5344CB8AC3E}">
-        <p14:creationId xmlns:p14="http://schemas.microsoft.com/office/powerpoint/2010/main" val="249381309"/>
+        <p14:creationId xmlns:p14="http://schemas.microsoft.com/office/powerpoint/2010/main" val="3027653154"/>
       </p:ext>
     </p:extLst>
   </p:cSld>
@@ -1046,14 +981,26 @@
           <a:bodyPr/>
           <a:lstStyle/>
           <a:p>
-            <a:endParaRPr lang="ru-RU" dirty="0"/>
+            <a:pPr marL="158750" indent="0">
+              <a:buNone/>
+            </a:pPr>
+            <a:endParaRPr lang="ru-RU" sz="1100" b="1" i="0" u="none" strike="noStrike" cap="none" dirty="0">
+              <a:solidFill>
+                <a:srgbClr val="000000"/>
+              </a:solidFill>
+              <a:effectLst/>
+              <a:latin typeface="Arial"/>
+              <a:ea typeface="Arial"/>
+              <a:cs typeface="Arial"/>
+              <a:sym typeface="Arial"/>
+            </a:endParaRPr>
           </a:p>
         </p:txBody>
       </p:sp>
     </p:spTree>
     <p:extLst>
       <p:ext uri="{BB962C8B-B14F-4D97-AF65-F5344CB8AC3E}">
-        <p14:creationId xmlns:p14="http://schemas.microsoft.com/office/powerpoint/2010/main" val="3027653154"/>
+        <p14:creationId xmlns:p14="http://schemas.microsoft.com/office/powerpoint/2010/main" val="736583546"/>
       </p:ext>
     </p:extLst>
   </p:cSld>
@@ -1107,79 +1054,6 @@
           <a:bodyPr/>
           <a:lstStyle/>
           <a:p>
-            <a:pPr marL="158750" indent="0">
-              <a:buNone/>
-            </a:pPr>
-            <a:endParaRPr lang="ru-RU" sz="1100" b="1" i="0" u="none" strike="noStrike" cap="none" dirty="0">
-              <a:solidFill>
-                <a:srgbClr val="000000"/>
-              </a:solidFill>
-              <a:effectLst/>
-              <a:latin typeface="Arial"/>
-              <a:ea typeface="Arial"/>
-              <a:cs typeface="Arial"/>
-              <a:sym typeface="Arial"/>
-            </a:endParaRPr>
-          </a:p>
-        </p:txBody>
-      </p:sp>
-    </p:spTree>
-    <p:extLst>
-      <p:ext uri="{BB962C8B-B14F-4D97-AF65-F5344CB8AC3E}">
-        <p14:creationId xmlns:p14="http://schemas.microsoft.com/office/powerpoint/2010/main" val="736583546"/>
-      </p:ext>
-    </p:extLst>
-  </p:cSld>
-  <p:clrMapOvr>
-    <a:masterClrMapping/>
-  </p:clrMapOvr>
-</p:notes>
-</file>
-
-<file path=ppt/notesSlides/notesSlide13.xml><?xml version="1.0" encoding="utf-8"?>
-<p:notes xmlns:a="http://schemas.openxmlformats.org/drawingml/2006/main" xmlns:r="http://schemas.openxmlformats.org/officeDocument/2006/relationships" xmlns:p="http://schemas.openxmlformats.org/presentationml/2006/main">
-  <p:cSld>
-    <p:spTree>
-      <p:nvGrpSpPr>
-        <p:cNvPr id="1" name=""/>
-        <p:cNvGrpSpPr/>
-        <p:nvPr/>
-      </p:nvGrpSpPr>
-      <p:grpSpPr>
-        <a:xfrm>
-          <a:off x="0" y="0"/>
-          <a:ext cx="0" cy="0"/>
-          <a:chOff x="0" y="0"/>
-          <a:chExt cx="0" cy="0"/>
-        </a:xfrm>
-      </p:grpSpPr>
-      <p:sp>
-        <p:nvSpPr>
-          <p:cNvPr id="2" name="Образ слайда 1"/>
-          <p:cNvSpPr>
-            <a:spLocks noGrp="1" noRot="1" noChangeAspect="1"/>
-          </p:cNvSpPr>
-          <p:nvPr>
-            <p:ph type="sldImg"/>
-          </p:nvPr>
-        </p:nvSpPr>
-        <p:spPr/>
-      </p:sp>
-      <p:sp>
-        <p:nvSpPr>
-          <p:cNvPr id="3" name="Заметки 2"/>
-          <p:cNvSpPr>
-            <a:spLocks noGrp="1"/>
-          </p:cNvSpPr>
-          <p:nvPr>
-            <p:ph type="body" idx="1"/>
-          </p:nvPr>
-        </p:nvSpPr>
-        <p:spPr/>
-        <p:txBody>
-          <a:bodyPr/>
-          <a:lstStyle/>
-          <a:p>
             <a:endParaRPr lang="ru-RU" dirty="0"/>
           </a:p>
         </p:txBody>
@@ -1197,7 +1071,7 @@
 </p:notes>
 </file>
 
-<file path=ppt/notesSlides/notesSlide14.xml><?xml version="1.0" encoding="utf-8"?>
+<file path=ppt/notesSlides/notesSlide13.xml><?xml version="1.0" encoding="utf-8"?>
 <p:notes xmlns:a="http://schemas.openxmlformats.org/drawingml/2006/main" xmlns:r="http://schemas.openxmlformats.org/officeDocument/2006/relationships" xmlns:p="http://schemas.openxmlformats.org/presentationml/2006/main">
   <p:cSld>
     <p:spTree>
@@ -1276,7 +1150,7 @@
 </p:notes>
 </file>
 
-<file path=ppt/notesSlides/notesSlide15.xml><?xml version="1.0" encoding="utf-8"?>
+<file path=ppt/notesSlides/notesSlide14.xml><?xml version="1.0" encoding="utf-8"?>
 <p:notes xmlns:a="http://schemas.openxmlformats.org/drawingml/2006/main" xmlns:r="http://schemas.openxmlformats.org/officeDocument/2006/relationships" xmlns:p="http://schemas.openxmlformats.org/presentationml/2006/main">
   <p:cSld>
     <p:spTree>
@@ -1355,6 +1229,67 @@
 </p:notes>
 </file>
 
+<file path=ppt/notesSlides/notesSlide15.xml><?xml version="1.0" encoding="utf-8"?>
+<p:notes xmlns:a="http://schemas.openxmlformats.org/drawingml/2006/main" xmlns:r="http://schemas.openxmlformats.org/officeDocument/2006/relationships" xmlns:p="http://schemas.openxmlformats.org/presentationml/2006/main">
+  <p:cSld>
+    <p:spTree>
+      <p:nvGrpSpPr>
+        <p:cNvPr id="1" name=""/>
+        <p:cNvGrpSpPr/>
+        <p:nvPr/>
+      </p:nvGrpSpPr>
+      <p:grpSpPr>
+        <a:xfrm>
+          <a:off x="0" y="0"/>
+          <a:ext cx="0" cy="0"/>
+          <a:chOff x="0" y="0"/>
+          <a:chExt cx="0" cy="0"/>
+        </a:xfrm>
+      </p:grpSpPr>
+      <p:sp>
+        <p:nvSpPr>
+          <p:cNvPr id="2" name="Образ слайда 1"/>
+          <p:cNvSpPr>
+            <a:spLocks noGrp="1" noRot="1" noChangeAspect="1"/>
+          </p:cNvSpPr>
+          <p:nvPr>
+            <p:ph type="sldImg"/>
+          </p:nvPr>
+        </p:nvSpPr>
+        <p:spPr/>
+      </p:sp>
+      <p:sp>
+        <p:nvSpPr>
+          <p:cNvPr id="3" name="Заметки 2"/>
+          <p:cNvSpPr>
+            <a:spLocks noGrp="1"/>
+          </p:cNvSpPr>
+          <p:nvPr>
+            <p:ph type="body" idx="1"/>
+          </p:nvPr>
+        </p:nvSpPr>
+        <p:spPr/>
+        <p:txBody>
+          <a:bodyPr/>
+          <a:lstStyle/>
+          <a:p>
+            <a:endParaRPr lang="ru-RU" dirty="0"/>
+          </a:p>
+        </p:txBody>
+      </p:sp>
+    </p:spTree>
+    <p:extLst>
+      <p:ext uri="{BB962C8B-B14F-4D97-AF65-F5344CB8AC3E}">
+        <p14:creationId xmlns:p14="http://schemas.microsoft.com/office/powerpoint/2010/main" val="232947638"/>
+      </p:ext>
+    </p:extLst>
+  </p:cSld>
+  <p:clrMapOvr>
+    <a:masterClrMapping/>
+  </p:clrMapOvr>
+</p:notes>
+</file>
+
 <file path=ppt/notesSlides/notesSlide16.xml><?xml version="1.0" encoding="utf-8"?>
 <p:notes xmlns:a="http://schemas.openxmlformats.org/drawingml/2006/main" xmlns:r="http://schemas.openxmlformats.org/officeDocument/2006/relationships" xmlns:p="http://schemas.openxmlformats.org/presentationml/2006/main">
   <p:cSld>
@@ -1482,6 +1417,71 @@
 </file>
 
 <file path=ppt/notesSlides/notesSlide18.xml><?xml version="1.0" encoding="utf-8"?>
+<p:notes xmlns:a="http://schemas.openxmlformats.org/drawingml/2006/main" xmlns:r="http://schemas.openxmlformats.org/officeDocument/2006/relationships" xmlns:p="http://schemas.openxmlformats.org/presentationml/2006/main">
+  <p:cSld>
+    <p:spTree>
+      <p:nvGrpSpPr>
+        <p:cNvPr id="1" name=""/>
+        <p:cNvGrpSpPr/>
+        <p:nvPr/>
+      </p:nvGrpSpPr>
+      <p:grpSpPr>
+        <a:xfrm>
+          <a:off x="0" y="0"/>
+          <a:ext cx="0" cy="0"/>
+          <a:chOff x="0" y="0"/>
+          <a:chExt cx="0" cy="0"/>
+        </a:xfrm>
+      </p:grpSpPr>
+      <p:sp>
+        <p:nvSpPr>
+          <p:cNvPr id="2" name="Образ слайда 1"/>
+          <p:cNvSpPr>
+            <a:spLocks noGrp="1" noRot="1" noChangeAspect="1"/>
+          </p:cNvSpPr>
+          <p:nvPr>
+            <p:ph type="sldImg"/>
+          </p:nvPr>
+        </p:nvSpPr>
+        <p:spPr/>
+      </p:sp>
+      <p:sp>
+        <p:nvSpPr>
+          <p:cNvPr id="3" name="Заметки 2"/>
+          <p:cNvSpPr>
+            <a:spLocks noGrp="1"/>
+          </p:cNvSpPr>
+          <p:nvPr>
+            <p:ph type="body" idx="1"/>
+          </p:nvPr>
+        </p:nvSpPr>
+        <p:spPr/>
+        <p:txBody>
+          <a:bodyPr/>
+          <a:lstStyle/>
+          <a:p>
+            <a:r>
+              <a:rPr lang="en-US" dirty="0"/>
+              <a:t> </a:t>
+            </a:r>
+            <a:endParaRPr lang="ru-RU" dirty="0"/>
+          </a:p>
+        </p:txBody>
+      </p:sp>
+    </p:spTree>
+    <p:extLst>
+      <p:ext uri="{BB962C8B-B14F-4D97-AF65-F5344CB8AC3E}">
+        <p14:creationId xmlns:p14="http://schemas.microsoft.com/office/powerpoint/2010/main" val="3510795492"/>
+      </p:ext>
+    </p:extLst>
+  </p:cSld>
+  <p:clrMapOvr>
+    <a:masterClrMapping/>
+  </p:clrMapOvr>
+</p:notes>
+</file>
+
+<file path=ppt/notesSlides/notesSlide19.xml><?xml version="1.0" encoding="utf-8"?>
 <p:notes xmlns:a="http://schemas.openxmlformats.org/drawingml/2006/main" xmlns:r="http://schemas.openxmlformats.org/officeDocument/2006/relationships" xmlns:p="http://schemas.openxmlformats.org/presentationml/2006/main">
   <p:cSld>
     <p:spTree>
@@ -1551,67 +1551,6 @@
     <p:extLst>
       <p:ext uri="{BB962C8B-B14F-4D97-AF65-F5344CB8AC3E}">
         <p14:creationId xmlns:p14="http://schemas.microsoft.com/office/powerpoint/2010/main" val="3212939661"/>
-      </p:ext>
-    </p:extLst>
-  </p:cSld>
-  <p:clrMapOvr>
-    <a:masterClrMapping/>
-  </p:clrMapOvr>
-</p:notes>
-</file>
-
-<file path=ppt/notesSlides/notesSlide19.xml><?xml version="1.0" encoding="utf-8"?>
-<p:notes xmlns:a="http://schemas.openxmlformats.org/drawingml/2006/main" xmlns:r="http://schemas.openxmlformats.org/officeDocument/2006/relationships" xmlns:p="http://schemas.openxmlformats.org/presentationml/2006/main">
-  <p:cSld>
-    <p:spTree>
-      <p:nvGrpSpPr>
-        <p:cNvPr id="1" name=""/>
-        <p:cNvGrpSpPr/>
-        <p:nvPr/>
-      </p:nvGrpSpPr>
-      <p:grpSpPr>
-        <a:xfrm>
-          <a:off x="0" y="0"/>
-          <a:ext cx="0" cy="0"/>
-          <a:chOff x="0" y="0"/>
-          <a:chExt cx="0" cy="0"/>
-        </a:xfrm>
-      </p:grpSpPr>
-      <p:sp>
-        <p:nvSpPr>
-          <p:cNvPr id="2" name="Образ слайда 1"/>
-          <p:cNvSpPr>
-            <a:spLocks noGrp="1" noRot="1" noChangeAspect="1"/>
-          </p:cNvSpPr>
-          <p:nvPr>
-            <p:ph type="sldImg"/>
-          </p:nvPr>
-        </p:nvSpPr>
-        <p:spPr/>
-      </p:sp>
-      <p:sp>
-        <p:nvSpPr>
-          <p:cNvPr id="3" name="Заметки 2"/>
-          <p:cNvSpPr>
-            <a:spLocks noGrp="1"/>
-          </p:cNvSpPr>
-          <p:nvPr>
-            <p:ph type="body" idx="1"/>
-          </p:nvPr>
-        </p:nvSpPr>
-        <p:spPr/>
-        <p:txBody>
-          <a:bodyPr/>
-          <a:lstStyle/>
-          <a:p>
-            <a:endParaRPr lang="ru-RU" dirty="0"/>
-          </a:p>
-        </p:txBody>
-      </p:sp>
-    </p:spTree>
-    <p:extLst>
-      <p:ext uri="{BB962C8B-B14F-4D97-AF65-F5344CB8AC3E}">
-        <p14:creationId xmlns:p14="http://schemas.microsoft.com/office/powerpoint/2010/main" val="378663949"/>
       </p:ext>
     </p:extLst>
   </p:cSld>
@@ -1718,6 +1657,67 @@
         </p:txBody>
       </p:sp>
     </p:spTree>
+  </p:cSld>
+  <p:clrMapOvr>
+    <a:masterClrMapping/>
+  </p:clrMapOvr>
+</p:notes>
+</file>
+
+<file path=ppt/notesSlides/notesSlide20.xml><?xml version="1.0" encoding="utf-8"?>
+<p:notes xmlns:a="http://schemas.openxmlformats.org/drawingml/2006/main" xmlns:r="http://schemas.openxmlformats.org/officeDocument/2006/relationships" xmlns:p="http://schemas.openxmlformats.org/presentationml/2006/main">
+  <p:cSld>
+    <p:spTree>
+      <p:nvGrpSpPr>
+        <p:cNvPr id="1" name=""/>
+        <p:cNvGrpSpPr/>
+        <p:nvPr/>
+      </p:nvGrpSpPr>
+      <p:grpSpPr>
+        <a:xfrm>
+          <a:off x="0" y="0"/>
+          <a:ext cx="0" cy="0"/>
+          <a:chOff x="0" y="0"/>
+          <a:chExt cx="0" cy="0"/>
+        </a:xfrm>
+      </p:grpSpPr>
+      <p:sp>
+        <p:nvSpPr>
+          <p:cNvPr id="2" name="Образ слайда 1"/>
+          <p:cNvSpPr>
+            <a:spLocks noGrp="1" noRot="1" noChangeAspect="1"/>
+          </p:cNvSpPr>
+          <p:nvPr>
+            <p:ph type="sldImg"/>
+          </p:nvPr>
+        </p:nvSpPr>
+        <p:spPr/>
+      </p:sp>
+      <p:sp>
+        <p:nvSpPr>
+          <p:cNvPr id="3" name="Заметки 2"/>
+          <p:cNvSpPr>
+            <a:spLocks noGrp="1"/>
+          </p:cNvSpPr>
+          <p:nvPr>
+            <p:ph type="body" idx="1"/>
+          </p:nvPr>
+        </p:nvSpPr>
+        <p:spPr/>
+        <p:txBody>
+          <a:bodyPr/>
+          <a:lstStyle/>
+          <a:p>
+            <a:endParaRPr lang="ru-RU" dirty="0"/>
+          </a:p>
+        </p:txBody>
+      </p:sp>
+    </p:spTree>
+    <p:extLst>
+      <p:ext uri="{BB962C8B-B14F-4D97-AF65-F5344CB8AC3E}">
+        <p14:creationId xmlns:p14="http://schemas.microsoft.com/office/powerpoint/2010/main" val="378663949"/>
+      </p:ext>
+    </p:extLst>
   </p:cSld>
   <p:clrMapOvr>
     <a:masterClrMapping/>
@@ -10169,13 +10169,7 @@
   <p:cSld>
     <p:spTree>
       <p:nvGrpSpPr>
-        <p:cNvPr id="1" name="Shape 203">
-          <a:extLst>
-            <a:ext uri="{FF2B5EF4-FFF2-40B4-BE49-F238E27FC236}">
-              <a16:creationId xmlns:a16="http://schemas.microsoft.com/office/drawing/2014/main" id="{FFA4B249-3D8C-6ECD-7A9D-AA4B31E1A18A}"/>
-            </a:ext>
-          </a:extLst>
-        </p:cNvPr>
+        <p:cNvPr id="1" name=""/>
         <p:cNvGrpSpPr/>
         <p:nvPr/>
       </p:nvGrpSpPr>
@@ -10189,568 +10183,164 @@
       </p:grpSpPr>
       <p:sp>
         <p:nvSpPr>
-          <p:cNvPr id="204" name="Google Shape;204;p41">
+          <p:cNvPr id="2" name="Заголовок 1">
             <a:extLst>
               <a:ext uri="{FF2B5EF4-FFF2-40B4-BE49-F238E27FC236}">
-                <a16:creationId xmlns:a16="http://schemas.microsoft.com/office/drawing/2014/main" id="{9EE6BDEF-3D92-EF18-FA94-C1C08DA8FFEA}"/>
+                <a16:creationId xmlns:a16="http://schemas.microsoft.com/office/drawing/2014/main" id="{E77BCB52-2518-29B6-7AA5-F6AB2BB427F5}"/>
               </a:ext>
             </a:extLst>
           </p:cNvPr>
-          <p:cNvSpPr txBox="1">
+          <p:cNvSpPr>
             <a:spLocks noGrp="1"/>
           </p:cNvSpPr>
           <p:nvPr>
             <p:ph type="title"/>
           </p:nvPr>
         </p:nvSpPr>
-        <p:spPr>
-          <a:xfrm>
-            <a:off x="419005" y="162055"/>
-            <a:ext cx="8520600" cy="1095900"/>
-          </a:xfrm>
-          <a:prstGeom prst="rect">
-            <a:avLst/>
-          </a:prstGeom>
-        </p:spPr>
+        <p:spPr/>
         <p:txBody>
-          <a:bodyPr spcFirstLastPara="1" wrap="square" lIns="91425" tIns="91425" rIns="91425" bIns="91425" anchor="t" anchorCtr="0">
-            <a:noAutofit/>
-          </a:bodyPr>
+          <a:bodyPr/>
           <a:lstStyle/>
           <a:p>
             <a:r>
+              <a:rPr lang="ru-RU" dirty="0"/>
+              <a:t>Преимущества реализованного </a:t>
+            </a:r>
+            <a:r>
               <a:rPr lang="en-US" dirty="0"/>
-              <a:t>Overlay </a:t>
-            </a:r>
-            <a:r>
-              <a:rPr lang="ru-RU" dirty="0"/>
-              <a:t>сеть</a:t>
-            </a:r>
+              <a:t>Overlay</a:t>
+            </a:r>
+            <a:br>
+              <a:rPr lang="en-US" dirty="0"/>
+            </a:br>
+            <a:br>
+              <a:rPr lang="en-US" b="0" dirty="0"/>
+            </a:br>
+            <a:endParaRPr lang="ru-RU" dirty="0"/>
           </a:p>
         </p:txBody>
       </p:sp>
       <p:sp>
         <p:nvSpPr>
-          <p:cNvPr id="6" name="TextBox 5">
+          <p:cNvPr id="3" name="Текст 2">
             <a:extLst>
               <a:ext uri="{FF2B5EF4-FFF2-40B4-BE49-F238E27FC236}">
-                <a16:creationId xmlns:a16="http://schemas.microsoft.com/office/drawing/2014/main" id="{0E632F3F-2A80-D706-0A2E-983C3627EBC4}"/>
+                <a16:creationId xmlns:a16="http://schemas.microsoft.com/office/drawing/2014/main" id="{C7DA7685-15DC-4232-7EEE-2F18D6FE28F0}"/>
               </a:ext>
             </a:extLst>
           </p:cNvPr>
-          <p:cNvSpPr txBox="1"/>
-          <p:nvPr/>
+          <p:cNvSpPr>
+            <a:spLocks noGrp="1"/>
+          </p:cNvSpPr>
+          <p:nvPr>
+            <p:ph type="body" idx="1"/>
+          </p:nvPr>
         </p:nvSpPr>
-        <p:spPr>
-          <a:xfrm>
-            <a:off x="636493" y="1627287"/>
-            <a:ext cx="8046720" cy="3108543"/>
-          </a:xfrm>
-          <a:prstGeom prst="rect">
-            <a:avLst/>
-          </a:prstGeom>
-          <a:noFill/>
-        </p:spPr>
+        <p:spPr/>
         <p:txBody>
-          <a:bodyPr wrap="square" rtlCol="0">
-            <a:spAutoFit/>
-          </a:bodyPr>
+          <a:bodyPr/>
           <a:lstStyle/>
           <a:p>
-            <a:pPr marL="285750" indent="-285750">
-              <a:buFont typeface="Arial" panose="020B0604020202020204" pitchFamily="34" charset="0"/>
-              <a:buChar char="•"/>
-            </a:pPr>
-            <a:endParaRPr lang="ru-RU" b="1" dirty="0">
-              <a:latin typeface="Roboto" panose="02000000000000000000" pitchFamily="2" charset="0"/>
-              <a:ea typeface="Roboto" panose="02000000000000000000" pitchFamily="2" charset="0"/>
-              <a:cs typeface="Roboto" panose="02000000000000000000" pitchFamily="2" charset="0"/>
-            </a:endParaRPr>
-          </a:p>
-          <a:p>
-            <a:pPr marL="285750" indent="-285750">
-              <a:buFont typeface="Arial" panose="020B0604020202020204" pitchFamily="34" charset="0"/>
-              <a:buChar char="•"/>
-            </a:pPr>
-            <a:r>
-              <a:rPr lang="en-US" b="1" dirty="0">
-                <a:latin typeface="Roboto" panose="02000000000000000000" pitchFamily="2" charset="0"/>
-                <a:ea typeface="Roboto" panose="02000000000000000000" pitchFamily="2" charset="0"/>
-                <a:cs typeface="Roboto" panose="02000000000000000000" pitchFamily="2" charset="0"/>
-              </a:rPr>
-              <a:t>VRF – </a:t>
-            </a:r>
-            <a:r>
-              <a:rPr lang="en-US" dirty="0" err="1">
-                <a:latin typeface="Roboto" panose="02000000000000000000" pitchFamily="2" charset="0"/>
-                <a:ea typeface="Roboto" panose="02000000000000000000" pitchFamily="2" charset="0"/>
-                <a:cs typeface="Roboto" panose="02000000000000000000" pitchFamily="2" charset="0"/>
-              </a:rPr>
-              <a:t>Vrf</a:t>
-            </a:r>
-            <a:r>
-              <a:rPr lang="en-US" dirty="0">
-                <a:latin typeface="Roboto" panose="02000000000000000000" pitchFamily="2" charset="0"/>
-                <a:ea typeface="Roboto" panose="02000000000000000000" pitchFamily="2" charset="0"/>
-                <a:cs typeface="Roboto" panose="02000000000000000000" pitchFamily="2" charset="0"/>
-              </a:rPr>
-              <a:t> Tenant</a:t>
-            </a:r>
-            <a:r>
-              <a:rPr lang="ru-RU" dirty="0">
-                <a:latin typeface="Roboto" panose="02000000000000000000" pitchFamily="2" charset="0"/>
-                <a:ea typeface="Roboto" panose="02000000000000000000" pitchFamily="2" charset="0"/>
-                <a:cs typeface="Roboto" panose="02000000000000000000" pitchFamily="2" charset="0"/>
-              </a:rPr>
-              <a:t>. В данной схеме рассматривается подключение к фабрике клиентских устройств, которые принадлежат единственному клиенту, т.е. юрлицу, в связи с этим они объединены в общий </a:t>
-            </a:r>
-            <a:r>
-              <a:rPr lang="en-US" dirty="0">
-                <a:latin typeface="Roboto" panose="02000000000000000000" pitchFamily="2" charset="0"/>
-                <a:ea typeface="Roboto" panose="02000000000000000000" pitchFamily="2" charset="0"/>
-                <a:cs typeface="Roboto" panose="02000000000000000000" pitchFamily="2" charset="0"/>
-              </a:rPr>
-              <a:t>VRF</a:t>
-            </a:r>
-            <a:endParaRPr lang="ru-RU" dirty="0">
-              <a:latin typeface="Roboto" panose="02000000000000000000" pitchFamily="2" charset="0"/>
-              <a:ea typeface="Roboto" panose="02000000000000000000" pitchFamily="2" charset="0"/>
-              <a:cs typeface="Roboto" panose="02000000000000000000" pitchFamily="2" charset="0"/>
-            </a:endParaRPr>
-          </a:p>
-          <a:p>
-            <a:pPr marL="285750" indent="-285750">
-              <a:buFont typeface="Arial" panose="020B0604020202020204" pitchFamily="34" charset="0"/>
-              <a:buChar char="•"/>
-            </a:pPr>
-            <a:r>
-              <a:rPr lang="en-US" b="1" dirty="0">
-                <a:latin typeface="Roboto" panose="02000000000000000000" pitchFamily="2" charset="0"/>
-                <a:ea typeface="Roboto" panose="02000000000000000000" pitchFamily="2" charset="0"/>
-                <a:cs typeface="Roboto" panose="02000000000000000000" pitchFamily="2" charset="0"/>
-              </a:rPr>
-              <a:t>VXLAN</a:t>
-            </a:r>
-            <a:r>
-              <a:rPr lang="en-US" dirty="0">
-                <a:latin typeface="Roboto" panose="02000000000000000000" pitchFamily="2" charset="0"/>
-                <a:ea typeface="Roboto" panose="02000000000000000000" pitchFamily="2" charset="0"/>
-                <a:cs typeface="Roboto" panose="02000000000000000000" pitchFamily="2" charset="0"/>
-              </a:rPr>
-              <a:t> - VXLAN-</a:t>
-            </a:r>
-            <a:r>
-              <a:rPr lang="ru-RU" dirty="0">
-                <a:latin typeface="Roboto" panose="02000000000000000000" pitchFamily="2" charset="0"/>
-                <a:ea typeface="Roboto" panose="02000000000000000000" pitchFamily="2" charset="0"/>
-                <a:cs typeface="Roboto" panose="02000000000000000000" pitchFamily="2" charset="0"/>
-              </a:rPr>
-              <a:t>туннели строятся между всеми </a:t>
-            </a:r>
-            <a:r>
-              <a:rPr lang="en-US" dirty="0">
-                <a:latin typeface="Roboto" panose="02000000000000000000" pitchFamily="2" charset="0"/>
-                <a:ea typeface="Roboto" panose="02000000000000000000" pitchFamily="2" charset="0"/>
-                <a:cs typeface="Roboto" panose="02000000000000000000" pitchFamily="2" charset="0"/>
-              </a:rPr>
-              <a:t>Leaf-</a:t>
-            </a:r>
-            <a:r>
-              <a:rPr lang="ru-RU" dirty="0">
-                <a:latin typeface="Roboto" panose="02000000000000000000" pitchFamily="2" charset="0"/>
-                <a:ea typeface="Roboto" panose="02000000000000000000" pitchFamily="2" charset="0"/>
-                <a:cs typeface="Roboto" panose="02000000000000000000" pitchFamily="2" charset="0"/>
-              </a:rPr>
-              <a:t>коммутаторами фабрики. Источник — </a:t>
-            </a:r>
-            <a:r>
-              <a:rPr lang="en-US" dirty="0">
-                <a:latin typeface="Roboto" panose="02000000000000000000" pitchFamily="2" charset="0"/>
-                <a:ea typeface="Roboto" panose="02000000000000000000" pitchFamily="2" charset="0"/>
-                <a:cs typeface="Roboto" panose="02000000000000000000" pitchFamily="2" charset="0"/>
-              </a:rPr>
-              <a:t>Loopback0, UDP </a:t>
-            </a:r>
-            <a:r>
-              <a:rPr lang="ru-RU" dirty="0">
-                <a:latin typeface="Roboto" panose="02000000000000000000" pitchFamily="2" charset="0"/>
-                <a:ea typeface="Roboto" panose="02000000000000000000" pitchFamily="2" charset="0"/>
-                <a:cs typeface="Roboto" panose="02000000000000000000" pitchFamily="2" charset="0"/>
-              </a:rPr>
-              <a:t>порт 4789.</a:t>
-            </a:r>
-            <a:endParaRPr lang="en-US" dirty="0">
-              <a:latin typeface="Roboto" panose="02000000000000000000" pitchFamily="2" charset="0"/>
-              <a:ea typeface="Roboto" panose="02000000000000000000" pitchFamily="2" charset="0"/>
-              <a:cs typeface="Roboto" panose="02000000000000000000" pitchFamily="2" charset="0"/>
-            </a:endParaRPr>
-          </a:p>
-          <a:p>
-            <a:pPr marL="285750" indent="-285750">
-              <a:buFont typeface="Arial" panose="020B0604020202020204" pitchFamily="34" charset="0"/>
-              <a:buChar char="•"/>
-            </a:pPr>
-            <a:r>
-              <a:rPr lang="en-US" b="1" dirty="0">
-                <a:latin typeface="Roboto" panose="02000000000000000000" pitchFamily="2" charset="0"/>
-                <a:ea typeface="Roboto" panose="02000000000000000000" pitchFamily="2" charset="0"/>
-                <a:cs typeface="Roboto" panose="02000000000000000000" pitchFamily="2" charset="0"/>
-              </a:rPr>
-              <a:t>EVPN</a:t>
-            </a:r>
-            <a:r>
-              <a:rPr lang="en-US" dirty="0">
-                <a:latin typeface="Roboto" panose="02000000000000000000" pitchFamily="2" charset="0"/>
-                <a:ea typeface="Roboto" panose="02000000000000000000" pitchFamily="2" charset="0"/>
-                <a:cs typeface="Roboto" panose="02000000000000000000" pitchFamily="2" charset="0"/>
-              </a:rPr>
-              <a:t> - MP-BGP </a:t>
-            </a:r>
-            <a:r>
-              <a:rPr lang="ru-RU" dirty="0">
-                <a:latin typeface="Roboto" panose="02000000000000000000" pitchFamily="2" charset="0"/>
-                <a:ea typeface="Roboto" panose="02000000000000000000" pitchFamily="2" charset="0"/>
-                <a:cs typeface="Roboto" panose="02000000000000000000" pitchFamily="2" charset="0"/>
-              </a:rPr>
-              <a:t>с </a:t>
-            </a:r>
-            <a:r>
-              <a:rPr lang="en-US" dirty="0">
-                <a:latin typeface="Roboto" panose="02000000000000000000" pitchFamily="2" charset="0"/>
-                <a:ea typeface="Roboto" panose="02000000000000000000" pitchFamily="2" charset="0"/>
-                <a:cs typeface="Roboto" panose="02000000000000000000" pitchFamily="2" charset="0"/>
-              </a:rPr>
-              <a:t>address-family l2vpn </a:t>
-            </a:r>
-            <a:r>
-              <a:rPr lang="en-US" dirty="0" err="1">
-                <a:latin typeface="Roboto" panose="02000000000000000000" pitchFamily="2" charset="0"/>
-                <a:ea typeface="Roboto" panose="02000000000000000000" pitchFamily="2" charset="0"/>
-                <a:cs typeface="Roboto" panose="02000000000000000000" pitchFamily="2" charset="0"/>
-              </a:rPr>
-              <a:t>evpn</a:t>
-            </a:r>
-            <a:r>
-              <a:rPr lang="en-US" dirty="0">
-                <a:latin typeface="Roboto" panose="02000000000000000000" pitchFamily="2" charset="0"/>
-                <a:ea typeface="Roboto" panose="02000000000000000000" pitchFamily="2" charset="0"/>
-                <a:cs typeface="Roboto" panose="02000000000000000000" pitchFamily="2" charset="0"/>
-              </a:rPr>
-              <a:t>. </a:t>
-            </a:r>
-            <a:r>
-              <a:rPr lang="en-US" b="1" dirty="0">
-                <a:latin typeface="Roboto" panose="02000000000000000000" pitchFamily="2" charset="0"/>
-                <a:ea typeface="Roboto" panose="02000000000000000000" pitchFamily="2" charset="0"/>
-                <a:cs typeface="Roboto" panose="02000000000000000000" pitchFamily="2" charset="0"/>
-              </a:rPr>
-              <a:t>L2VNI</a:t>
-            </a:r>
-            <a:r>
-              <a:rPr lang="en-US" dirty="0">
-                <a:latin typeface="Roboto" panose="02000000000000000000" pitchFamily="2" charset="0"/>
-                <a:ea typeface="Roboto" panose="02000000000000000000" pitchFamily="2" charset="0"/>
-                <a:cs typeface="Roboto" panose="02000000000000000000" pitchFamily="2" charset="0"/>
-              </a:rPr>
-              <a:t> - VNI 10010 </a:t>
-            </a:r>
-            <a:r>
-              <a:rPr lang="ru-RU" dirty="0">
-                <a:latin typeface="Roboto" panose="02000000000000000000" pitchFamily="2" charset="0"/>
-                <a:ea typeface="Roboto" panose="02000000000000000000" pitchFamily="2" charset="0"/>
-                <a:cs typeface="Roboto" panose="02000000000000000000" pitchFamily="2" charset="0"/>
-              </a:rPr>
-              <a:t>для </a:t>
-            </a:r>
-            <a:r>
-              <a:rPr lang="en-US" dirty="0">
-                <a:latin typeface="Roboto" panose="02000000000000000000" pitchFamily="2" charset="0"/>
-                <a:ea typeface="Roboto" panose="02000000000000000000" pitchFamily="2" charset="0"/>
-                <a:cs typeface="Roboto" panose="02000000000000000000" pitchFamily="2" charset="0"/>
-              </a:rPr>
-              <a:t>VLAN 10, VNI 10020 </a:t>
-            </a:r>
-            <a:r>
-              <a:rPr lang="ru-RU" dirty="0">
-                <a:latin typeface="Roboto" panose="02000000000000000000" pitchFamily="2" charset="0"/>
-                <a:ea typeface="Roboto" panose="02000000000000000000" pitchFamily="2" charset="0"/>
-                <a:cs typeface="Roboto" panose="02000000000000000000" pitchFamily="2" charset="0"/>
-              </a:rPr>
-              <a:t>для </a:t>
-            </a:r>
-            <a:r>
-              <a:rPr lang="en-US" dirty="0">
-                <a:latin typeface="Roboto" panose="02000000000000000000" pitchFamily="2" charset="0"/>
-                <a:ea typeface="Roboto" panose="02000000000000000000" pitchFamily="2" charset="0"/>
-                <a:cs typeface="Roboto" panose="02000000000000000000" pitchFamily="2" charset="0"/>
-              </a:rPr>
-              <a:t>VLAN 20, VNI 10030 </a:t>
-            </a:r>
-            <a:r>
-              <a:rPr lang="ru-RU" dirty="0">
-                <a:latin typeface="Roboto" panose="02000000000000000000" pitchFamily="2" charset="0"/>
-                <a:ea typeface="Roboto" panose="02000000000000000000" pitchFamily="2" charset="0"/>
-                <a:cs typeface="Roboto" panose="02000000000000000000" pitchFamily="2" charset="0"/>
-              </a:rPr>
-              <a:t>для </a:t>
-            </a:r>
-            <a:r>
-              <a:rPr lang="en-US" dirty="0">
-                <a:latin typeface="Roboto" panose="02000000000000000000" pitchFamily="2" charset="0"/>
-                <a:ea typeface="Roboto" panose="02000000000000000000" pitchFamily="2" charset="0"/>
-                <a:cs typeface="Roboto" panose="02000000000000000000" pitchFamily="2" charset="0"/>
-              </a:rPr>
-              <a:t>VLAN 30</a:t>
-            </a:r>
-            <a:r>
-              <a:rPr lang="ru-RU" dirty="0">
-                <a:latin typeface="Roboto" panose="02000000000000000000" pitchFamily="2" charset="0"/>
-                <a:ea typeface="Roboto" panose="02000000000000000000" pitchFamily="2" charset="0"/>
-                <a:cs typeface="Roboto" panose="02000000000000000000" pitchFamily="2" charset="0"/>
-              </a:rPr>
-              <a:t> и </a:t>
-            </a:r>
-            <a:r>
-              <a:rPr lang="ru-RU" dirty="0" err="1">
-                <a:latin typeface="Roboto" panose="02000000000000000000" pitchFamily="2" charset="0"/>
-                <a:ea typeface="Roboto" panose="02000000000000000000" pitchFamily="2" charset="0"/>
-                <a:cs typeface="Roboto" panose="02000000000000000000" pitchFamily="2" charset="0"/>
-              </a:rPr>
-              <a:t>т.д</a:t>
-            </a:r>
-            <a:r>
-              <a:rPr lang="en-US" dirty="0">
-                <a:latin typeface="Roboto" panose="02000000000000000000" pitchFamily="2" charset="0"/>
-                <a:ea typeface="Roboto" panose="02000000000000000000" pitchFamily="2" charset="0"/>
-                <a:cs typeface="Roboto" panose="02000000000000000000" pitchFamily="2" charset="0"/>
-              </a:rPr>
-              <a:t>.</a:t>
-            </a:r>
-          </a:p>
-          <a:p>
-            <a:pPr marL="285750" indent="-285750">
-              <a:buFont typeface="Arial" panose="020B0604020202020204" pitchFamily="34" charset="0"/>
-              <a:buChar char="•"/>
-            </a:pPr>
-            <a:r>
-              <a:rPr lang="en-US" b="1" dirty="0">
-                <a:latin typeface="Roboto" panose="02000000000000000000" pitchFamily="2" charset="0"/>
-                <a:ea typeface="Roboto" panose="02000000000000000000" pitchFamily="2" charset="0"/>
-                <a:cs typeface="Roboto" panose="02000000000000000000" pitchFamily="2" charset="0"/>
-              </a:rPr>
-              <a:t>L3VNI</a:t>
-            </a:r>
-            <a:r>
-              <a:rPr lang="en-US" dirty="0">
-                <a:latin typeface="Roboto" panose="02000000000000000000" pitchFamily="2" charset="0"/>
-                <a:ea typeface="Roboto" panose="02000000000000000000" pitchFamily="2" charset="0"/>
-                <a:cs typeface="Roboto" panose="02000000000000000000" pitchFamily="2" charset="0"/>
-              </a:rPr>
-              <a:t> - VNI </a:t>
-            </a:r>
-            <a:r>
-              <a:rPr lang="ru-RU" dirty="0">
-                <a:latin typeface="Roboto" panose="02000000000000000000" pitchFamily="2" charset="0"/>
-                <a:ea typeface="Roboto" panose="02000000000000000000" pitchFamily="2" charset="0"/>
-                <a:cs typeface="Roboto" panose="02000000000000000000" pitchFamily="2" charset="0"/>
-              </a:rPr>
-              <a:t>10100</a:t>
-            </a:r>
-            <a:r>
-              <a:rPr lang="en-US" dirty="0">
-                <a:latin typeface="Roboto" panose="02000000000000000000" pitchFamily="2" charset="0"/>
-                <a:ea typeface="Roboto" panose="02000000000000000000" pitchFamily="2" charset="0"/>
-                <a:cs typeface="Roboto" panose="02000000000000000000" pitchFamily="2" charset="0"/>
-              </a:rPr>
-              <a:t> </a:t>
-            </a:r>
-            <a:r>
-              <a:rPr lang="ru-RU" dirty="0">
-                <a:latin typeface="Roboto" panose="02000000000000000000" pitchFamily="2" charset="0"/>
-                <a:ea typeface="Roboto" panose="02000000000000000000" pitchFamily="2" charset="0"/>
-                <a:cs typeface="Roboto" panose="02000000000000000000" pitchFamily="2" charset="0"/>
-              </a:rPr>
-              <a:t>для </a:t>
-            </a:r>
-            <a:r>
-              <a:rPr lang="en-US" dirty="0">
-                <a:latin typeface="Roboto" panose="02000000000000000000" pitchFamily="2" charset="0"/>
-                <a:ea typeface="Roboto" panose="02000000000000000000" pitchFamily="2" charset="0"/>
-                <a:cs typeface="Roboto" panose="02000000000000000000" pitchFamily="2" charset="0"/>
-              </a:rPr>
-              <a:t>VRF Tenant</a:t>
-            </a:r>
-          </a:p>
-          <a:p>
-            <a:pPr marL="285750" indent="-285750">
-              <a:buFont typeface="Arial" panose="020B0604020202020204" pitchFamily="34" charset="0"/>
-              <a:buChar char="•"/>
-            </a:pPr>
-            <a:r>
-              <a:rPr lang="en-US" b="1" dirty="0">
-                <a:latin typeface="Roboto" panose="02000000000000000000" pitchFamily="2" charset="0"/>
-                <a:ea typeface="Roboto" panose="02000000000000000000" pitchFamily="2" charset="0"/>
-                <a:cs typeface="Roboto" panose="02000000000000000000" pitchFamily="2" charset="0"/>
-              </a:rPr>
-              <a:t>Anycast Gateway</a:t>
-            </a:r>
-            <a:r>
-              <a:rPr lang="en-US" dirty="0">
-                <a:latin typeface="Roboto" panose="02000000000000000000" pitchFamily="2" charset="0"/>
-                <a:ea typeface="Roboto" panose="02000000000000000000" pitchFamily="2" charset="0"/>
-                <a:cs typeface="Roboto" panose="02000000000000000000" pitchFamily="2" charset="0"/>
-              </a:rPr>
-              <a:t> - </a:t>
-            </a:r>
-            <a:r>
-              <a:rPr lang="ru-RU" dirty="0">
-                <a:latin typeface="Roboto" panose="02000000000000000000" pitchFamily="2" charset="0"/>
-                <a:ea typeface="Roboto" panose="02000000000000000000" pitchFamily="2" charset="0"/>
-                <a:cs typeface="Roboto" panose="02000000000000000000" pitchFamily="2" charset="0"/>
-              </a:rPr>
-              <a:t>В данной схеме мы предполагаем, что время отсутствия сервиса крайне критично для приложений, расположенных на </a:t>
-            </a:r>
-            <a:r>
-              <a:rPr lang="en-US" dirty="0">
-                <a:latin typeface="Roboto" panose="02000000000000000000" pitchFamily="2" charset="0"/>
-                <a:ea typeface="Roboto" panose="02000000000000000000" pitchFamily="2" charset="0"/>
-                <a:cs typeface="Roboto" panose="02000000000000000000" pitchFamily="2" charset="0"/>
-              </a:rPr>
-              <a:t>Ce1-s1, Ce2-s1, Ce1-s2, Ce2-s2</a:t>
-            </a:r>
-            <a:r>
-              <a:rPr lang="ru-RU" dirty="0">
-                <a:latin typeface="Roboto" panose="02000000000000000000" pitchFamily="2" charset="0"/>
-                <a:ea typeface="Roboto" panose="02000000000000000000" pitchFamily="2" charset="0"/>
-                <a:cs typeface="Roboto" panose="02000000000000000000" pitchFamily="2" charset="0"/>
-              </a:rPr>
-              <a:t>. В связи с этим, схема резервирования Настроена на </a:t>
-            </a:r>
-            <a:r>
-              <a:rPr lang="en-US" dirty="0">
-                <a:latin typeface="Roboto" panose="02000000000000000000" pitchFamily="2" charset="0"/>
-                <a:ea typeface="Roboto" panose="02000000000000000000" pitchFamily="2" charset="0"/>
-                <a:cs typeface="Roboto" panose="02000000000000000000" pitchFamily="2" charset="0"/>
-              </a:rPr>
-              <a:t>Leaf1-s1+Leaf2-s1</a:t>
-            </a:r>
-            <a:r>
-              <a:rPr lang="ru-RU" dirty="0">
-                <a:latin typeface="Roboto" panose="02000000000000000000" pitchFamily="2" charset="0"/>
-                <a:ea typeface="Roboto" panose="02000000000000000000" pitchFamily="2" charset="0"/>
-                <a:cs typeface="Roboto" panose="02000000000000000000" pitchFamily="2" charset="0"/>
-              </a:rPr>
-              <a:t> и на</a:t>
-            </a:r>
-            <a:r>
-              <a:rPr lang="en-US" dirty="0">
-                <a:latin typeface="Roboto" panose="02000000000000000000" pitchFamily="2" charset="0"/>
-                <a:ea typeface="Roboto" panose="02000000000000000000" pitchFamily="2" charset="0"/>
-                <a:cs typeface="Roboto" panose="02000000000000000000" pitchFamily="2" charset="0"/>
-              </a:rPr>
-              <a:t> Leaf2-s1+Leaf2-s2: SVI </a:t>
-            </a:r>
-            <a:r>
-              <a:rPr lang="ru-RU" dirty="0">
-                <a:latin typeface="Roboto" panose="02000000000000000000" pitchFamily="2" charset="0"/>
-                <a:ea typeface="Roboto" panose="02000000000000000000" pitchFamily="2" charset="0"/>
-                <a:cs typeface="Roboto" panose="02000000000000000000" pitchFamily="2" charset="0"/>
-              </a:rPr>
-              <a:t>с одинаковым </a:t>
-            </a:r>
-            <a:r>
-              <a:rPr lang="en-US" dirty="0">
-                <a:latin typeface="Roboto" panose="02000000000000000000" pitchFamily="2" charset="0"/>
-                <a:ea typeface="Roboto" panose="02000000000000000000" pitchFamily="2" charset="0"/>
-                <a:cs typeface="Roboto" panose="02000000000000000000" pitchFamily="2" charset="0"/>
-              </a:rPr>
-              <a:t>IP </a:t>
-            </a:r>
-            <a:r>
-              <a:rPr lang="ru-RU" dirty="0">
-                <a:latin typeface="Roboto" panose="02000000000000000000" pitchFamily="2" charset="0"/>
-                <a:ea typeface="Roboto" panose="02000000000000000000" pitchFamily="2" charset="0"/>
-                <a:cs typeface="Roboto" panose="02000000000000000000" pitchFamily="2" charset="0"/>
-              </a:rPr>
-              <a:t>и виртуальным </a:t>
-            </a:r>
-            <a:r>
-              <a:rPr lang="en-US" dirty="0">
-                <a:latin typeface="Roboto" panose="02000000000000000000" pitchFamily="2" charset="0"/>
-                <a:ea typeface="Roboto" panose="02000000000000000000" pitchFamily="2" charset="0"/>
-                <a:cs typeface="Roboto" panose="02000000000000000000" pitchFamily="2" charset="0"/>
-              </a:rPr>
-              <a:t>MAC-</a:t>
-            </a:r>
-            <a:r>
-              <a:rPr lang="ru-RU" dirty="0">
-                <a:latin typeface="Roboto" panose="02000000000000000000" pitchFamily="2" charset="0"/>
-                <a:ea typeface="Roboto" panose="02000000000000000000" pitchFamily="2" charset="0"/>
-                <a:cs typeface="Roboto" panose="02000000000000000000" pitchFamily="2" charset="0"/>
-              </a:rPr>
-              <a:t>адресом </a:t>
-            </a:r>
-          </a:p>
-          <a:p>
-            <a:pPr marL="285750" indent="-285750">
-              <a:buFont typeface="Arial" panose="020B0604020202020204" pitchFamily="34" charset="0"/>
-              <a:buChar char="•"/>
-            </a:pPr>
+            <a:r>
+              <a:rPr lang="ru-RU" b="1" dirty="0"/>
+              <a:t>Масштабируемость</a:t>
+            </a:r>
+            <a:r>
+              <a:rPr lang="ru-RU" dirty="0"/>
+              <a:t> — до 16 млн VNI против 4096 VLAN, возможность добавления новых клиентов без изменения физической сети.</a:t>
+            </a:r>
+          </a:p>
+          <a:p>
+            <a:r>
+              <a:rPr lang="ru-RU" b="1" dirty="0"/>
+              <a:t>Оптимальная маршрутизация</a:t>
+            </a:r>
+            <a:r>
+              <a:rPr lang="ru-RU" dirty="0"/>
+              <a:t> — </a:t>
+            </a:r>
+            <a:r>
+              <a:rPr lang="ru-RU" dirty="0" err="1"/>
+              <a:t>Anycast</a:t>
+            </a:r>
+            <a:r>
+              <a:rPr lang="ru-RU" dirty="0"/>
+              <a:t> Gateway позволяет трафику выходить на ближайший </a:t>
+            </a:r>
+            <a:r>
+              <a:rPr lang="ru-RU" dirty="0" err="1"/>
+              <a:t>Leaf</a:t>
+            </a:r>
+            <a:r>
+              <a:rPr lang="ru-RU" dirty="0"/>
+              <a:t>, избегая "трафика-футбола" (</a:t>
+            </a:r>
+            <a:r>
+              <a:rPr lang="ru-RU" dirty="0" err="1"/>
+              <a:t>traffic</a:t>
+            </a:r>
+            <a:r>
+              <a:rPr lang="ru-RU" dirty="0"/>
+              <a:t> </a:t>
+            </a:r>
+            <a:r>
+              <a:rPr lang="ru-RU" dirty="0" err="1"/>
+              <a:t>tromboning</a:t>
+            </a:r>
+            <a:r>
+              <a:rPr lang="ru-RU" dirty="0"/>
+              <a:t>).</a:t>
+            </a:r>
+          </a:p>
+          <a:p>
+            <a:r>
+              <a:rPr lang="ru-RU" b="1" dirty="0"/>
+              <a:t>Отказоустойчивость</a:t>
+            </a:r>
+            <a:r>
+              <a:rPr lang="ru-RU" dirty="0"/>
+              <a:t> — при отказе </a:t>
+            </a:r>
+            <a:r>
+              <a:rPr lang="ru-RU" dirty="0" err="1"/>
+              <a:t>Leaf</a:t>
+            </a:r>
+            <a:r>
+              <a:rPr lang="ru-RU" dirty="0"/>
+              <a:t> его функции шлюза мгновенно подхватывают другие </a:t>
+            </a:r>
+            <a:r>
+              <a:rPr lang="ru-RU" dirty="0" err="1"/>
+              <a:t>Leaf</a:t>
+            </a:r>
+            <a:r>
+              <a:rPr lang="ru-RU" dirty="0"/>
+              <a:t> благодаря виртуальному MAC и IP.</a:t>
+            </a:r>
+          </a:p>
+          <a:p>
+            <a:r>
+              <a:rPr lang="ru-RU" b="1" dirty="0"/>
+              <a:t>Поддержка </a:t>
+            </a:r>
+            <a:r>
+              <a:rPr lang="ru-RU" b="1" dirty="0" err="1"/>
+              <a:t>мультихоминга</a:t>
+            </a:r>
+            <a:r>
+              <a:rPr lang="ru-RU" dirty="0"/>
+              <a:t> — активное-активное подключение серверов с автоматическим переключением при отказах.</a:t>
+            </a:r>
+          </a:p>
+          <a:p>
             <a:endParaRPr lang="ru-RU" dirty="0"/>
-          </a:p>
-        </p:txBody>
-      </p:sp>
-      <p:sp>
-        <p:nvSpPr>
-          <p:cNvPr id="10" name="TextBox 9">
-            <a:extLst>
-              <a:ext uri="{FF2B5EF4-FFF2-40B4-BE49-F238E27FC236}">
-                <a16:creationId xmlns:a16="http://schemas.microsoft.com/office/drawing/2014/main" id="{B3E6D195-B81A-C520-6EFD-80746423CA07}"/>
-              </a:ext>
-            </a:extLst>
-          </p:cNvPr>
-          <p:cNvSpPr txBox="1"/>
-          <p:nvPr/>
-        </p:nvSpPr>
-        <p:spPr>
-          <a:xfrm>
-            <a:off x="636493" y="710005"/>
-            <a:ext cx="5292764" cy="369332"/>
-          </a:xfrm>
-          <a:prstGeom prst="rect">
-            <a:avLst/>
-          </a:prstGeom>
-          <a:noFill/>
-        </p:spPr>
-        <p:txBody>
-          <a:bodyPr wrap="square" rtlCol="0">
-            <a:spAutoFit/>
-          </a:bodyPr>
-          <a:lstStyle/>
-          <a:p>
-            <a:r>
-              <a:rPr lang="ru-RU" sz="1800" b="1" dirty="0">
-                <a:latin typeface="Roboto" panose="02000000000000000000" pitchFamily="2" charset="0"/>
-                <a:ea typeface="Roboto" panose="02000000000000000000" pitchFamily="2" charset="0"/>
-                <a:cs typeface="Roboto" panose="02000000000000000000" pitchFamily="2" charset="0"/>
-              </a:rPr>
-              <a:t>Архитектурные компоненты </a:t>
-            </a:r>
-            <a:r>
-              <a:rPr lang="en-US" sz="1800" b="1" dirty="0">
-                <a:latin typeface="Roboto" panose="02000000000000000000" pitchFamily="2" charset="0"/>
-                <a:ea typeface="Roboto" panose="02000000000000000000" pitchFamily="2" charset="0"/>
-                <a:cs typeface="Roboto" panose="02000000000000000000" pitchFamily="2" charset="0"/>
-              </a:rPr>
-              <a:t>Overlay</a:t>
-            </a:r>
           </a:p>
         </p:txBody>
       </p:sp>
     </p:spTree>
     <p:extLst>
       <p:ext uri="{BB962C8B-B14F-4D97-AF65-F5344CB8AC3E}">
-        <p14:creationId xmlns:p14="http://schemas.microsoft.com/office/powerpoint/2010/main" val="3449582108"/>
+        <p14:creationId xmlns:p14="http://schemas.microsoft.com/office/powerpoint/2010/main" val="2602990505"/>
       </p:ext>
     </p:extLst>
   </p:cSld>
@@ -10790,200 +10380,6 @@
           <p:cNvPr id="2" name="Заголовок 1">
             <a:extLst>
               <a:ext uri="{FF2B5EF4-FFF2-40B4-BE49-F238E27FC236}">
-                <a16:creationId xmlns:a16="http://schemas.microsoft.com/office/drawing/2014/main" id="{E77BCB52-2518-29B6-7AA5-F6AB2BB427F5}"/>
-              </a:ext>
-            </a:extLst>
-          </p:cNvPr>
-          <p:cNvSpPr>
-            <a:spLocks noGrp="1"/>
-          </p:cNvSpPr>
-          <p:nvPr>
-            <p:ph type="title"/>
-          </p:nvPr>
-        </p:nvSpPr>
-        <p:spPr/>
-        <p:txBody>
-          <a:bodyPr/>
-          <a:lstStyle/>
-          <a:p>
-            <a:r>
-              <a:rPr lang="ru-RU" dirty="0"/>
-              <a:t>Преимущества реализованного </a:t>
-            </a:r>
-            <a:r>
-              <a:rPr lang="en-US" dirty="0"/>
-              <a:t>Overlay</a:t>
-            </a:r>
-            <a:br>
-              <a:rPr lang="en-US" dirty="0"/>
-            </a:br>
-            <a:br>
-              <a:rPr lang="en-US" b="0" dirty="0"/>
-            </a:br>
-            <a:endParaRPr lang="ru-RU" dirty="0"/>
-          </a:p>
-        </p:txBody>
-      </p:sp>
-      <p:sp>
-        <p:nvSpPr>
-          <p:cNvPr id="3" name="Текст 2">
-            <a:extLst>
-              <a:ext uri="{FF2B5EF4-FFF2-40B4-BE49-F238E27FC236}">
-                <a16:creationId xmlns:a16="http://schemas.microsoft.com/office/drawing/2014/main" id="{C7DA7685-15DC-4232-7EEE-2F18D6FE28F0}"/>
-              </a:ext>
-            </a:extLst>
-          </p:cNvPr>
-          <p:cNvSpPr>
-            <a:spLocks noGrp="1"/>
-          </p:cNvSpPr>
-          <p:nvPr>
-            <p:ph type="body" idx="1"/>
-          </p:nvPr>
-        </p:nvSpPr>
-        <p:spPr/>
-        <p:txBody>
-          <a:bodyPr/>
-          <a:lstStyle/>
-          <a:p>
-            <a:r>
-              <a:rPr lang="ru-RU" b="1" dirty="0"/>
-              <a:t>Масштабируемость</a:t>
-            </a:r>
-            <a:r>
-              <a:rPr lang="ru-RU" dirty="0"/>
-              <a:t> — до 16 млн VNI против 4096 VLAN, возможность добавления новых клиентов без изменения физической сети.</a:t>
-            </a:r>
-          </a:p>
-          <a:p>
-            <a:r>
-              <a:rPr lang="ru-RU" b="1" dirty="0"/>
-              <a:t>Оптимальная маршрутизация</a:t>
-            </a:r>
-            <a:r>
-              <a:rPr lang="ru-RU" dirty="0"/>
-              <a:t> — </a:t>
-            </a:r>
-            <a:r>
-              <a:rPr lang="ru-RU" dirty="0" err="1"/>
-              <a:t>Anycast</a:t>
-            </a:r>
-            <a:r>
-              <a:rPr lang="ru-RU" dirty="0"/>
-              <a:t> Gateway позволяет трафику выходить на ближайший </a:t>
-            </a:r>
-            <a:r>
-              <a:rPr lang="ru-RU" dirty="0" err="1"/>
-              <a:t>Leaf</a:t>
-            </a:r>
-            <a:r>
-              <a:rPr lang="ru-RU" dirty="0"/>
-              <a:t>, избегая "трафика-футбола" (</a:t>
-            </a:r>
-            <a:r>
-              <a:rPr lang="ru-RU" dirty="0" err="1"/>
-              <a:t>traffic</a:t>
-            </a:r>
-            <a:r>
-              <a:rPr lang="ru-RU" dirty="0"/>
-              <a:t> </a:t>
-            </a:r>
-            <a:r>
-              <a:rPr lang="ru-RU" dirty="0" err="1"/>
-              <a:t>tromboning</a:t>
-            </a:r>
-            <a:r>
-              <a:rPr lang="ru-RU" dirty="0"/>
-              <a:t>).</a:t>
-            </a:r>
-          </a:p>
-          <a:p>
-            <a:r>
-              <a:rPr lang="ru-RU" b="1" dirty="0"/>
-              <a:t>Отказоустойчивость</a:t>
-            </a:r>
-            <a:r>
-              <a:rPr lang="ru-RU" dirty="0"/>
-              <a:t> — при отказе </a:t>
-            </a:r>
-            <a:r>
-              <a:rPr lang="ru-RU" dirty="0" err="1"/>
-              <a:t>Leaf</a:t>
-            </a:r>
-            <a:r>
-              <a:rPr lang="ru-RU" dirty="0"/>
-              <a:t> его функции шлюза мгновенно подхватывают другие </a:t>
-            </a:r>
-            <a:r>
-              <a:rPr lang="ru-RU" dirty="0" err="1"/>
-              <a:t>Leaf</a:t>
-            </a:r>
-            <a:r>
-              <a:rPr lang="ru-RU" dirty="0"/>
-              <a:t> благодаря виртуальному MAC и IP.</a:t>
-            </a:r>
-          </a:p>
-          <a:p>
-            <a:r>
-              <a:rPr lang="ru-RU" b="1" dirty="0"/>
-              <a:t>Поддержка </a:t>
-            </a:r>
-            <a:r>
-              <a:rPr lang="ru-RU" b="1" dirty="0" err="1"/>
-              <a:t>мультихоминга</a:t>
-            </a:r>
-            <a:r>
-              <a:rPr lang="ru-RU" dirty="0"/>
-              <a:t> — активное-активное подключение серверов с автоматическим переключением при отказах.</a:t>
-            </a:r>
-          </a:p>
-          <a:p>
-            <a:endParaRPr lang="ru-RU" dirty="0"/>
-          </a:p>
-        </p:txBody>
-      </p:sp>
-    </p:spTree>
-    <p:extLst>
-      <p:ext uri="{BB962C8B-B14F-4D97-AF65-F5344CB8AC3E}">
-        <p14:creationId xmlns:p14="http://schemas.microsoft.com/office/powerpoint/2010/main" val="2602990505"/>
-      </p:ext>
-    </p:extLst>
-  </p:cSld>
-  <p:clrMapOvr>
-    <a:masterClrMapping/>
-  </p:clrMapOvr>
-  <mc:AlternateContent xmlns:mc="http://schemas.openxmlformats.org/markup-compatibility/2006" xmlns:p14="http://schemas.microsoft.com/office/powerpoint/2010/main">
-    <mc:Choice Requires="p14">
-      <p:transition spd="slow" p14:dur="3000"/>
-    </mc:Choice>
-    <mc:Fallback xmlns="">
-      <p:transition spd="slow"/>
-    </mc:Fallback>
-  </mc:AlternateContent>
-</p:sld>
-</file>
-
-<file path=ppt/slides/slide12.xml><?xml version="1.0" encoding="utf-8"?>
-<p:sld xmlns:a="http://schemas.openxmlformats.org/drawingml/2006/main" xmlns:r="http://schemas.openxmlformats.org/officeDocument/2006/relationships" xmlns:p="http://schemas.openxmlformats.org/presentationml/2006/main">
-  <p:cSld>
-    <p:spTree>
-      <p:nvGrpSpPr>
-        <p:cNvPr id="1" name=""/>
-        <p:cNvGrpSpPr/>
-        <p:nvPr/>
-      </p:nvGrpSpPr>
-      <p:grpSpPr>
-        <a:xfrm>
-          <a:off x="0" y="0"/>
-          <a:ext cx="0" cy="0"/>
-          <a:chOff x="0" y="0"/>
-          <a:chExt cx="0" cy="0"/>
-        </a:xfrm>
-      </p:grpSpPr>
-      <p:sp>
-        <p:nvSpPr>
-          <p:cNvPr id="2" name="Заголовок 1">
-            <a:extLst>
-              <a:ext uri="{FF2B5EF4-FFF2-40B4-BE49-F238E27FC236}">
                 <a16:creationId xmlns:a16="http://schemas.microsoft.com/office/drawing/2014/main" id="{BA1D4901-61CE-169A-6A64-2BA4B0BB581D}"/>
               </a:ext>
             </a:extLst>
@@ -11235,7 +10631,7 @@
 </p:sld>
 </file>
 
-<file path=ppt/slides/slide13.xml><?xml version="1.0" encoding="utf-8"?>
+<file path=ppt/slides/slide12.xml><?xml version="1.0" encoding="utf-8"?>
 <p:sld xmlns:a="http://schemas.openxmlformats.org/drawingml/2006/main" xmlns:r="http://schemas.openxmlformats.org/officeDocument/2006/relationships" xmlns:p="http://schemas.openxmlformats.org/presentationml/2006/main">
   <p:cSld>
     <p:spTree>
@@ -11389,7 +10785,7 @@
 </p:sld>
 </file>
 
-<file path=ppt/slides/slide14.xml><?xml version="1.0" encoding="utf-8"?>
+<file path=ppt/slides/slide13.xml><?xml version="1.0" encoding="utf-8"?>
 <p:sld xmlns:a="http://schemas.openxmlformats.org/drawingml/2006/main" xmlns:r="http://schemas.openxmlformats.org/officeDocument/2006/relationships" xmlns:p="http://schemas.openxmlformats.org/presentationml/2006/main">
   <p:cSld>
     <p:spTree>
@@ -11466,11 +10862,13 @@
         <p:spPr>
           <a:xfrm>
             <a:off x="500550" y="1284692"/>
-            <a:ext cx="8520600" cy="3416400"/>
+            <a:ext cx="4294650" cy="644908"/>
           </a:xfrm>
         </p:spPr>
         <p:txBody>
-          <a:bodyPr/>
+          <a:bodyPr>
+            <a:normAutofit/>
+          </a:bodyPr>
           <a:lstStyle/>
           <a:p>
             <a:pPr marL="133350" indent="0">
@@ -11486,7 +10884,7 @@
             </a:r>
             <a:r>
               <a:rPr lang="en-US" b="1" dirty="0"/>
-              <a:t>Ce4-s1 </a:t>
+              <a:t>ce1-s1 </a:t>
             </a:r>
             <a:r>
               <a:rPr lang="ru-RU" b="1" dirty="0"/>
@@ -11494,18 +10892,78 @@
             </a:r>
             <a:r>
               <a:rPr lang="en-US" b="1" dirty="0"/>
-              <a:t>Ce2-s2</a:t>
+              <a:t>Ce4-s2</a:t>
             </a:r>
             <a:endParaRPr lang="ru-RU" b="1" dirty="0"/>
           </a:p>
-          <a:p>
-            <a:pPr marL="133350" indent="0">
-              <a:buNone/>
-            </a:pPr>
-            <a:br>
-              <a:rPr lang="ru-RU" dirty="0"/>
-            </a:br>
-            <a:endParaRPr lang="ru-RU" dirty="0"/>
+        </p:txBody>
+      </p:sp>
+      <p:pic>
+        <p:nvPicPr>
+          <p:cNvPr id="4" name="Рисунок 3">
+            <a:extLst>
+              <a:ext uri="{FF2B5EF4-FFF2-40B4-BE49-F238E27FC236}">
+                <a16:creationId xmlns:a16="http://schemas.microsoft.com/office/drawing/2014/main" id="{167D44AE-3DFF-44ED-938D-1B6A189B3B4E}"/>
+              </a:ext>
+            </a:extLst>
+          </p:cNvPr>
+          <p:cNvPicPr>
+            <a:picLocks noChangeAspect="1"/>
+          </p:cNvPicPr>
+          <p:nvPr/>
+        </p:nvPicPr>
+        <p:blipFill>
+          <a:blip r:embed="rId3"/>
+          <a:stretch>
+            <a:fillRect/>
+          </a:stretch>
+        </p:blipFill>
+        <p:spPr>
+          <a:xfrm>
+            <a:off x="612829" y="1979366"/>
+            <a:ext cx="4404742" cy="1737511"/>
+          </a:xfrm>
+          <a:prstGeom prst="rect">
+            <a:avLst/>
+          </a:prstGeom>
+        </p:spPr>
+      </p:pic>
+      <p:sp>
+        <p:nvSpPr>
+          <p:cNvPr id="6" name="TextBox 5">
+            <a:extLst>
+              <a:ext uri="{FF2B5EF4-FFF2-40B4-BE49-F238E27FC236}">
+                <a16:creationId xmlns:a16="http://schemas.microsoft.com/office/drawing/2014/main" id="{2D537807-3DF5-4A2B-8029-676C586DFBAC}"/>
+              </a:ext>
+            </a:extLst>
+          </p:cNvPr>
+          <p:cNvSpPr txBox="1"/>
+          <p:nvPr/>
+        </p:nvSpPr>
+        <p:spPr>
+          <a:xfrm>
+            <a:off x="612829" y="3858808"/>
+            <a:ext cx="1367682" cy="276999"/>
+          </a:xfrm>
+          <a:prstGeom prst="rect">
+            <a:avLst/>
+          </a:prstGeom>
+          <a:noFill/>
+        </p:spPr>
+        <p:txBody>
+          <a:bodyPr wrap="none" rtlCol="0">
+            <a:spAutoFit/>
+          </a:bodyPr>
+          <a:lstStyle/>
+          <a:p>
+            <a:r>
+              <a:rPr lang="ru-RU" sz="1200" b="1" dirty="0">
+                <a:latin typeface="Roboto" panose="02000000000000000000" pitchFamily="2" charset="0"/>
+                <a:ea typeface="Roboto" panose="02000000000000000000" pitchFamily="2" charset="0"/>
+                <a:cs typeface="Roboto" panose="02000000000000000000" pitchFamily="2" charset="0"/>
+              </a:rPr>
+              <a:t>Связность есть.</a:t>
+            </a:r>
           </a:p>
         </p:txBody>
       </p:sp>
@@ -11530,7 +10988,7 @@
 </p:sld>
 </file>
 
-<file path=ppt/slides/slide15.xml><?xml version="1.0" encoding="utf-8"?>
+<file path=ppt/slides/slide14.xml><?xml version="1.0" encoding="utf-8"?>
 <p:sld xmlns:a="http://schemas.openxmlformats.org/drawingml/2006/main" xmlns:r="http://schemas.openxmlformats.org/officeDocument/2006/relationships" xmlns:p="http://schemas.openxmlformats.org/presentationml/2006/main">
   <p:cSld>
     <p:spTree>
@@ -11606,12 +11064,14 @@
         </p:nvSpPr>
         <p:spPr>
           <a:xfrm>
-            <a:off x="500550" y="1284692"/>
-            <a:ext cx="8520600" cy="3416400"/>
+            <a:off x="572550" y="878674"/>
+            <a:ext cx="3200250" cy="547950"/>
           </a:xfrm>
         </p:spPr>
         <p:txBody>
-          <a:bodyPr/>
+          <a:bodyPr>
+            <a:normAutofit/>
+          </a:bodyPr>
           <a:lstStyle/>
           <a:p>
             <a:pPr marL="133350" indent="0">
@@ -11619,7 +11079,7 @@
             </a:pPr>
             <a:r>
               <a:rPr lang="en-US" b="1" dirty="0"/>
-              <a:t>ping Ce1-s1 </a:t>
+              <a:t>ping ce3-s2 </a:t>
             </a:r>
             <a:r>
               <a:rPr lang="ru-RU" b="1" dirty="0"/>
@@ -11627,17 +11087,77 @@
             </a:r>
             <a:r>
               <a:rPr lang="en-US" b="1" dirty="0"/>
-              <a:t>Ce3-s2</a:t>
-            </a:r>
-          </a:p>
-          <a:p>
-            <a:pPr marL="133350" indent="0">
-              <a:buNone/>
-            </a:pPr>
-            <a:br>
-              <a:rPr lang="ru-RU" dirty="0"/>
-            </a:br>
-            <a:endParaRPr lang="ru-RU" dirty="0"/>
+              <a:t>Ce2-s1</a:t>
+            </a:r>
+          </a:p>
+        </p:txBody>
+      </p:sp>
+      <p:pic>
+        <p:nvPicPr>
+          <p:cNvPr id="4" name="Рисунок 3">
+            <a:extLst>
+              <a:ext uri="{FF2B5EF4-FFF2-40B4-BE49-F238E27FC236}">
+                <a16:creationId xmlns:a16="http://schemas.microsoft.com/office/drawing/2014/main" id="{2C0DAE77-E025-4C16-9B4F-24EF7FCF11B6}"/>
+              </a:ext>
+            </a:extLst>
+          </p:cNvPr>
+          <p:cNvPicPr>
+            <a:picLocks noChangeAspect="1"/>
+          </p:cNvPicPr>
+          <p:nvPr/>
+        </p:nvPicPr>
+        <p:blipFill>
+          <a:blip r:embed="rId3"/>
+          <a:stretch>
+            <a:fillRect/>
+          </a:stretch>
+        </p:blipFill>
+        <p:spPr>
+          <a:xfrm>
+            <a:off x="709398" y="1426624"/>
+            <a:ext cx="4427604" cy="2110923"/>
+          </a:xfrm>
+          <a:prstGeom prst="rect">
+            <a:avLst/>
+          </a:prstGeom>
+        </p:spPr>
+      </p:pic>
+      <p:sp>
+        <p:nvSpPr>
+          <p:cNvPr id="5" name="TextBox 4">
+            <a:extLst>
+              <a:ext uri="{FF2B5EF4-FFF2-40B4-BE49-F238E27FC236}">
+                <a16:creationId xmlns:a16="http://schemas.microsoft.com/office/drawing/2014/main" id="{173510C6-3ED9-4106-8D0C-A8EF5015493A}"/>
+              </a:ext>
+            </a:extLst>
+          </p:cNvPr>
+          <p:cNvSpPr txBox="1"/>
+          <p:nvPr/>
+        </p:nvSpPr>
+        <p:spPr>
+          <a:xfrm>
+            <a:off x="709398" y="3716877"/>
+            <a:ext cx="1367682" cy="276999"/>
+          </a:xfrm>
+          <a:prstGeom prst="rect">
+            <a:avLst/>
+          </a:prstGeom>
+          <a:noFill/>
+        </p:spPr>
+        <p:txBody>
+          <a:bodyPr wrap="none" rtlCol="0">
+            <a:spAutoFit/>
+          </a:bodyPr>
+          <a:lstStyle/>
+          <a:p>
+            <a:r>
+              <a:rPr lang="ru-RU" sz="1200" b="1" dirty="0">
+                <a:latin typeface="Roboto" panose="02000000000000000000" pitchFamily="2" charset="0"/>
+                <a:ea typeface="Roboto" panose="02000000000000000000" pitchFamily="2" charset="0"/>
+                <a:cs typeface="Roboto" panose="02000000000000000000" pitchFamily="2" charset="0"/>
+              </a:rPr>
+              <a:t>Связность есть.</a:t>
+            </a:r>
           </a:p>
         </p:txBody>
       </p:sp>
@@ -11645,6 +11165,289 @@
     <p:extLst>
       <p:ext uri="{BB962C8B-B14F-4D97-AF65-F5344CB8AC3E}">
         <p14:creationId xmlns:p14="http://schemas.microsoft.com/office/powerpoint/2010/main" val="1745763076"/>
+      </p:ext>
+    </p:extLst>
+  </p:cSld>
+  <p:clrMapOvr>
+    <a:masterClrMapping/>
+  </p:clrMapOvr>
+  <mc:AlternateContent xmlns:mc="http://schemas.openxmlformats.org/markup-compatibility/2006" xmlns:p14="http://schemas.microsoft.com/office/powerpoint/2010/main">
+    <mc:Choice Requires="p14">
+      <p:transition spd="slow" p14:dur="3000"/>
+    </mc:Choice>
+    <mc:Fallback xmlns="">
+      <p:transition spd="slow"/>
+    </mc:Fallback>
+  </mc:AlternateContent>
+</p:sld>
+</file>
+
+<file path=ppt/slides/slide15.xml><?xml version="1.0" encoding="utf-8"?>
+<p:sld xmlns:a="http://schemas.openxmlformats.org/drawingml/2006/main" xmlns:r="http://schemas.openxmlformats.org/officeDocument/2006/relationships" xmlns:p="http://schemas.openxmlformats.org/presentationml/2006/main">
+  <p:cSld>
+    <p:spTree>
+      <p:nvGrpSpPr>
+        <p:cNvPr id="1" name=""/>
+        <p:cNvGrpSpPr/>
+        <p:nvPr/>
+      </p:nvGrpSpPr>
+      <p:grpSpPr>
+        <a:xfrm>
+          <a:off x="0" y="0"/>
+          <a:ext cx="0" cy="0"/>
+          <a:chOff x="0" y="0"/>
+          <a:chExt cx="0" cy="0"/>
+        </a:xfrm>
+      </p:grpSpPr>
+      <p:sp>
+        <p:nvSpPr>
+          <p:cNvPr id="2" name="Заголовок 1">
+            <a:extLst>
+              <a:ext uri="{FF2B5EF4-FFF2-40B4-BE49-F238E27FC236}">
+                <a16:creationId xmlns:a16="http://schemas.microsoft.com/office/drawing/2014/main" id="{385B32E5-230C-1808-EA27-36C6FBFAA19D}"/>
+              </a:ext>
+            </a:extLst>
+          </p:cNvPr>
+          <p:cNvSpPr>
+            <a:spLocks noGrp="1"/>
+          </p:cNvSpPr>
+          <p:nvPr>
+            <p:ph type="title"/>
+          </p:nvPr>
+        </p:nvSpPr>
+        <p:spPr/>
+        <p:txBody>
+          <a:bodyPr/>
+          <a:lstStyle/>
+          <a:p>
+            <a:r>
+              <a:rPr lang="ru-RU" dirty="0"/>
+              <a:t>Проверка работоспособности</a:t>
+            </a:r>
+            <a:br>
+              <a:rPr lang="ru-RU" dirty="0"/>
+            </a:br>
+            <a:endParaRPr lang="ru-RU" sz="1600" dirty="0"/>
+          </a:p>
+        </p:txBody>
+      </p:sp>
+      <p:sp>
+        <p:nvSpPr>
+          <p:cNvPr id="9" name="TextBox 8">
+            <a:extLst>
+              <a:ext uri="{FF2B5EF4-FFF2-40B4-BE49-F238E27FC236}">
+                <a16:creationId xmlns:a16="http://schemas.microsoft.com/office/drawing/2014/main" id="{665A4C07-328B-E7F2-39BD-6C8D3CAD65D3}"/>
+              </a:ext>
+            </a:extLst>
+          </p:cNvPr>
+          <p:cNvSpPr txBox="1"/>
+          <p:nvPr/>
+        </p:nvSpPr>
+        <p:spPr>
+          <a:xfrm>
+            <a:off x="705971" y="878674"/>
+            <a:ext cx="5170005" cy="584775"/>
+          </a:xfrm>
+          <a:prstGeom prst="rect">
+            <a:avLst/>
+          </a:prstGeom>
+          <a:noFill/>
+        </p:spPr>
+        <p:txBody>
+          <a:bodyPr wrap="none" rtlCol="0">
+            <a:spAutoFit/>
+          </a:bodyPr>
+          <a:lstStyle/>
+          <a:p>
+            <a:r>
+              <a:rPr lang="ru-RU" sz="1800" b="1" dirty="0">
+                <a:latin typeface="Roboto" panose="02000000000000000000" pitchFamily="2" charset="0"/>
+                <a:ea typeface="Roboto" panose="02000000000000000000" pitchFamily="2" charset="0"/>
+                <a:cs typeface="Roboto" panose="02000000000000000000" pitchFamily="2" charset="0"/>
+              </a:rPr>
+              <a:t>Проверка отказоустойчивости </a:t>
+            </a:r>
+            <a:r>
+              <a:rPr lang="ru-RU" sz="1800" b="1" i="1" dirty="0" err="1">
+                <a:latin typeface="Roboto" panose="02000000000000000000" pitchFamily="2" charset="0"/>
+                <a:ea typeface="Roboto" panose="02000000000000000000" pitchFamily="2" charset="0"/>
+                <a:cs typeface="Roboto" panose="02000000000000000000" pitchFamily="2" charset="0"/>
+              </a:rPr>
+              <a:t>Мультихоминг</a:t>
+            </a:r>
+            <a:endParaRPr lang="ru-RU" sz="1800" b="1" dirty="0">
+              <a:latin typeface="Roboto" panose="02000000000000000000" pitchFamily="2" charset="0"/>
+              <a:ea typeface="Roboto" panose="02000000000000000000" pitchFamily="2" charset="0"/>
+              <a:cs typeface="Roboto" panose="02000000000000000000" pitchFamily="2" charset="0"/>
+            </a:endParaRPr>
+          </a:p>
+          <a:p>
+            <a:endParaRPr lang="ru-RU" dirty="0"/>
+          </a:p>
+        </p:txBody>
+      </p:sp>
+      <p:sp>
+        <p:nvSpPr>
+          <p:cNvPr id="5" name="TextBox 4">
+            <a:extLst>
+              <a:ext uri="{FF2B5EF4-FFF2-40B4-BE49-F238E27FC236}">
+                <a16:creationId xmlns:a16="http://schemas.microsoft.com/office/drawing/2014/main" id="{709F90C4-3282-41CF-9F12-6E31067F505A}"/>
+              </a:ext>
+            </a:extLst>
+          </p:cNvPr>
+          <p:cNvSpPr txBox="1"/>
+          <p:nvPr/>
+        </p:nvSpPr>
+        <p:spPr>
+          <a:xfrm>
+            <a:off x="701725" y="1186450"/>
+            <a:ext cx="4059125" cy="276999"/>
+          </a:xfrm>
+          <a:prstGeom prst="rect">
+            <a:avLst/>
+          </a:prstGeom>
+          <a:noFill/>
+        </p:spPr>
+        <p:txBody>
+          <a:bodyPr wrap="none" rtlCol="0">
+            <a:spAutoFit/>
+          </a:bodyPr>
+          <a:lstStyle/>
+          <a:p>
+            <a:r>
+              <a:rPr lang="ru-RU" sz="1200" b="1" dirty="0">
+                <a:latin typeface="Roboto" panose="02000000000000000000" pitchFamily="2" charset="0"/>
+                <a:ea typeface="Roboto" panose="02000000000000000000" pitchFamily="2" charset="0"/>
+                <a:cs typeface="Roboto" panose="02000000000000000000" pitchFamily="2" charset="0"/>
+              </a:rPr>
+              <a:t>Запускаем </a:t>
+            </a:r>
+            <a:r>
+              <a:rPr lang="en-US" sz="1200" b="1" dirty="0">
+                <a:latin typeface="Roboto" panose="02000000000000000000" pitchFamily="2" charset="0"/>
+                <a:ea typeface="Roboto" panose="02000000000000000000" pitchFamily="2" charset="0"/>
+                <a:cs typeface="Roboto" panose="02000000000000000000" pitchFamily="2" charset="0"/>
+              </a:rPr>
+              <a:t>ping ce1-s1 </a:t>
+            </a:r>
+            <a:r>
+              <a:rPr lang="en-US" sz="1200" b="1" dirty="0">
+                <a:latin typeface="Roboto" panose="02000000000000000000" pitchFamily="2" charset="0"/>
+                <a:ea typeface="Roboto" panose="02000000000000000000" pitchFamily="2" charset="0"/>
+                <a:cs typeface="Roboto" panose="02000000000000000000" pitchFamily="2" charset="0"/>
+                <a:sym typeface="Wingdings" panose="05000000000000000000" pitchFamily="2" charset="2"/>
+              </a:rPr>
+              <a:t> ce3-s2, </a:t>
+            </a:r>
+            <a:r>
+              <a:rPr lang="ru-RU" sz="1200" b="1" dirty="0">
+                <a:latin typeface="Roboto" panose="02000000000000000000" pitchFamily="2" charset="0"/>
+                <a:ea typeface="Roboto" panose="02000000000000000000" pitchFamily="2" charset="0"/>
+                <a:cs typeface="Roboto" panose="02000000000000000000" pitchFamily="2" charset="0"/>
+                <a:sym typeface="Wingdings" panose="05000000000000000000" pitchFamily="2" charset="2"/>
+              </a:rPr>
+              <a:t>отключаем </a:t>
+            </a:r>
+            <a:r>
+              <a:rPr lang="en-US" sz="1200" b="1" dirty="0">
+                <a:latin typeface="Roboto" panose="02000000000000000000" pitchFamily="2" charset="0"/>
+                <a:ea typeface="Roboto" panose="02000000000000000000" pitchFamily="2" charset="0"/>
+                <a:cs typeface="Roboto" panose="02000000000000000000" pitchFamily="2" charset="0"/>
+                <a:sym typeface="Wingdings" panose="05000000000000000000" pitchFamily="2" charset="2"/>
+              </a:rPr>
+              <a:t>leaf1-s1</a:t>
+            </a:r>
+            <a:endParaRPr lang="ru-RU" sz="1200" b="1" dirty="0">
+              <a:latin typeface="Roboto" panose="02000000000000000000" pitchFamily="2" charset="0"/>
+              <a:ea typeface="Roboto" panose="02000000000000000000" pitchFamily="2" charset="0"/>
+              <a:cs typeface="Roboto" panose="02000000000000000000" pitchFamily="2" charset="0"/>
+            </a:endParaRPr>
+          </a:p>
+        </p:txBody>
+      </p:sp>
+      <p:pic>
+        <p:nvPicPr>
+          <p:cNvPr id="3" name="Рисунок 2">
+            <a:extLst>
+              <a:ext uri="{FF2B5EF4-FFF2-40B4-BE49-F238E27FC236}">
+                <a16:creationId xmlns:a16="http://schemas.microsoft.com/office/drawing/2014/main" id="{05371E7B-4AB3-462C-A462-0C0943269FCC}"/>
+              </a:ext>
+            </a:extLst>
+          </p:cNvPr>
+          <p:cNvPicPr>
+            <a:picLocks noChangeAspect="1"/>
+          </p:cNvPicPr>
+          <p:nvPr/>
+        </p:nvPicPr>
+        <p:blipFill>
+          <a:blip r:embed="rId3"/>
+          <a:stretch>
+            <a:fillRect/>
+          </a:stretch>
+        </p:blipFill>
+        <p:spPr>
+          <a:xfrm>
+            <a:off x="744925" y="1542637"/>
+            <a:ext cx="4267570" cy="2591025"/>
+          </a:xfrm>
+          <a:prstGeom prst="rect">
+            <a:avLst/>
+          </a:prstGeom>
+        </p:spPr>
+      </p:pic>
+      <p:sp>
+        <p:nvSpPr>
+          <p:cNvPr id="6" name="TextBox 5">
+            <a:extLst>
+              <a:ext uri="{FF2B5EF4-FFF2-40B4-BE49-F238E27FC236}">
+                <a16:creationId xmlns:a16="http://schemas.microsoft.com/office/drawing/2014/main" id="{74E4C591-3AB4-48C5-9072-7CADB80BFCC8}"/>
+              </a:ext>
+            </a:extLst>
+          </p:cNvPr>
+          <p:cNvSpPr txBox="1"/>
+          <p:nvPr/>
+        </p:nvSpPr>
+        <p:spPr>
+          <a:xfrm>
+            <a:off x="645325" y="4272175"/>
+            <a:ext cx="6572633" cy="461665"/>
+          </a:xfrm>
+          <a:prstGeom prst="rect">
+            <a:avLst/>
+          </a:prstGeom>
+          <a:noFill/>
+        </p:spPr>
+        <p:txBody>
+          <a:bodyPr wrap="none" rtlCol="0">
+            <a:spAutoFit/>
+          </a:bodyPr>
+          <a:lstStyle/>
+          <a:p>
+            <a:r>
+              <a:rPr lang="ru-RU" sz="1200" b="1" dirty="0">
+                <a:latin typeface="Roboto" panose="02000000000000000000" pitchFamily="2" charset="0"/>
+                <a:ea typeface="Roboto" panose="02000000000000000000" pitchFamily="2" charset="0"/>
+                <a:cs typeface="Roboto" panose="02000000000000000000" pitchFamily="2" charset="0"/>
+              </a:rPr>
+              <a:t>Наблюдаем 2.5 секунды потерь траффика в сценарии «Аварийный отказ устройства», </a:t>
+            </a:r>
+          </a:p>
+          <a:p>
+            <a:r>
+              <a:rPr lang="ru-RU" sz="1200" b="1" dirty="0">
+                <a:latin typeface="Roboto" panose="02000000000000000000" pitchFamily="2" charset="0"/>
+                <a:ea typeface="Roboto" panose="02000000000000000000" pitchFamily="2" charset="0"/>
+                <a:cs typeface="Roboto" panose="02000000000000000000" pitchFamily="2" charset="0"/>
+              </a:rPr>
+              <a:t>после чего траффик восстанавливается автоматически</a:t>
+            </a:r>
+          </a:p>
+        </p:txBody>
+      </p:sp>
+    </p:spTree>
+    <p:extLst>
+      <p:ext uri="{BB962C8B-B14F-4D97-AF65-F5344CB8AC3E}">
+        <p14:creationId xmlns:p14="http://schemas.microsoft.com/office/powerpoint/2010/main" val="3566359900"/>
       </p:ext>
     </p:extLst>
   </p:cSld>
@@ -11763,6 +11566,212 @@
           </a:p>
           <a:p>
             <a:endParaRPr lang="ru-RU" dirty="0"/>
+          </a:p>
+        </p:txBody>
+      </p:sp>
+      <p:sp>
+        <p:nvSpPr>
+          <p:cNvPr id="5" name="TextBox 4">
+            <a:extLst>
+              <a:ext uri="{FF2B5EF4-FFF2-40B4-BE49-F238E27FC236}">
+                <a16:creationId xmlns:a16="http://schemas.microsoft.com/office/drawing/2014/main" id="{709F90C4-3282-41CF-9F12-6E31067F505A}"/>
+              </a:ext>
+            </a:extLst>
+          </p:cNvPr>
+          <p:cNvSpPr txBox="1"/>
+          <p:nvPr/>
+        </p:nvSpPr>
+        <p:spPr>
+          <a:xfrm>
+            <a:off x="701725" y="1186450"/>
+            <a:ext cx="4905510" cy="276999"/>
+          </a:xfrm>
+          <a:prstGeom prst="rect">
+            <a:avLst/>
+          </a:prstGeom>
+          <a:noFill/>
+        </p:spPr>
+        <p:txBody>
+          <a:bodyPr wrap="none" rtlCol="0">
+            <a:spAutoFit/>
+          </a:bodyPr>
+          <a:lstStyle/>
+          <a:p>
+            <a:r>
+              <a:rPr lang="ru-RU" sz="1200" b="1" dirty="0">
+                <a:latin typeface="Roboto" panose="02000000000000000000" pitchFamily="2" charset="0"/>
+                <a:ea typeface="Roboto" panose="02000000000000000000" pitchFamily="2" charset="0"/>
+                <a:cs typeface="Roboto" panose="02000000000000000000" pitchFamily="2" charset="0"/>
+              </a:rPr>
+              <a:t>Запускаем </a:t>
+            </a:r>
+            <a:r>
+              <a:rPr lang="en-US" sz="1200" b="1" dirty="0">
+                <a:latin typeface="Roboto" panose="02000000000000000000" pitchFamily="2" charset="0"/>
+                <a:ea typeface="Roboto" panose="02000000000000000000" pitchFamily="2" charset="0"/>
+                <a:cs typeface="Roboto" panose="02000000000000000000" pitchFamily="2" charset="0"/>
+              </a:rPr>
+              <a:t>ping ce3-s2 </a:t>
+            </a:r>
+            <a:r>
+              <a:rPr lang="en-US" sz="1200" b="1" dirty="0">
+                <a:latin typeface="Roboto" panose="02000000000000000000" pitchFamily="2" charset="0"/>
+                <a:ea typeface="Roboto" panose="02000000000000000000" pitchFamily="2" charset="0"/>
+                <a:cs typeface="Roboto" panose="02000000000000000000" pitchFamily="2" charset="0"/>
+                <a:sym typeface="Wingdings" panose="05000000000000000000" pitchFamily="2" charset="2"/>
+              </a:rPr>
+              <a:t> ce1-s2, </a:t>
+            </a:r>
+            <a:r>
+              <a:rPr lang="ru-RU" sz="1200" b="1" dirty="0">
+                <a:latin typeface="Roboto" panose="02000000000000000000" pitchFamily="2" charset="0"/>
+                <a:ea typeface="Roboto" panose="02000000000000000000" pitchFamily="2" charset="0"/>
+                <a:cs typeface="Roboto" panose="02000000000000000000" pitchFamily="2" charset="0"/>
+                <a:sym typeface="Wingdings" panose="05000000000000000000" pitchFamily="2" charset="2"/>
+              </a:rPr>
+              <a:t>отключаем </a:t>
+            </a:r>
+            <a:r>
+              <a:rPr lang="en-US" sz="1200" b="1" dirty="0">
+                <a:latin typeface="Roboto" panose="02000000000000000000" pitchFamily="2" charset="0"/>
+                <a:ea typeface="Roboto" panose="02000000000000000000" pitchFamily="2" charset="0"/>
+                <a:cs typeface="Roboto" panose="02000000000000000000" pitchFamily="2" charset="0"/>
+                <a:sym typeface="Wingdings" panose="05000000000000000000" pitchFamily="2" charset="2"/>
+              </a:rPr>
+              <a:t>leaf1-s2/Ethernet11</a:t>
+            </a:r>
+            <a:endParaRPr lang="ru-RU" sz="1200" b="1" dirty="0">
+              <a:latin typeface="Roboto" panose="02000000000000000000" pitchFamily="2" charset="0"/>
+              <a:ea typeface="Roboto" panose="02000000000000000000" pitchFamily="2" charset="0"/>
+              <a:cs typeface="Roboto" panose="02000000000000000000" pitchFamily="2" charset="0"/>
+            </a:endParaRPr>
+          </a:p>
+        </p:txBody>
+      </p:sp>
+      <p:pic>
+        <p:nvPicPr>
+          <p:cNvPr id="4" name="Рисунок 3">
+            <a:extLst>
+              <a:ext uri="{FF2B5EF4-FFF2-40B4-BE49-F238E27FC236}">
+                <a16:creationId xmlns:a16="http://schemas.microsoft.com/office/drawing/2014/main" id="{E7AFAA93-FF3E-4EBA-BD37-61C1D123E014}"/>
+              </a:ext>
+            </a:extLst>
+          </p:cNvPr>
+          <p:cNvPicPr>
+            <a:picLocks noChangeAspect="1"/>
+          </p:cNvPicPr>
+          <p:nvPr/>
+        </p:nvPicPr>
+        <p:blipFill>
+          <a:blip r:embed="rId3"/>
+          <a:stretch>
+            <a:fillRect/>
+          </a:stretch>
+        </p:blipFill>
+        <p:spPr>
+          <a:xfrm>
+            <a:off x="705971" y="1539349"/>
+            <a:ext cx="5170005" cy="2064801"/>
+          </a:xfrm>
+          <a:prstGeom prst="rect">
+            <a:avLst/>
+          </a:prstGeom>
+        </p:spPr>
+      </p:pic>
+      <p:sp>
+        <p:nvSpPr>
+          <p:cNvPr id="7" name="TextBox 6">
+            <a:extLst>
+              <a:ext uri="{FF2B5EF4-FFF2-40B4-BE49-F238E27FC236}">
+                <a16:creationId xmlns:a16="http://schemas.microsoft.com/office/drawing/2014/main" id="{06B53894-6D77-46C8-95DF-39BC204B3473}"/>
+              </a:ext>
+            </a:extLst>
+          </p:cNvPr>
+          <p:cNvSpPr txBox="1"/>
+          <p:nvPr/>
+        </p:nvSpPr>
+        <p:spPr>
+          <a:xfrm>
+            <a:off x="386125" y="3818550"/>
+            <a:ext cx="6114174" cy="461665"/>
+          </a:xfrm>
+          <a:prstGeom prst="rect">
+            <a:avLst/>
+          </a:prstGeom>
+          <a:noFill/>
+        </p:spPr>
+        <p:txBody>
+          <a:bodyPr wrap="none" rtlCol="0">
+            <a:spAutoFit/>
+          </a:bodyPr>
+          <a:lstStyle/>
+          <a:p>
+            <a:r>
+              <a:rPr lang="ru-RU" sz="1200" b="1" dirty="0">
+                <a:latin typeface="Roboto" panose="02000000000000000000" pitchFamily="2" charset="0"/>
+                <a:ea typeface="Roboto" panose="02000000000000000000" pitchFamily="2" charset="0"/>
+                <a:cs typeface="Roboto" panose="02000000000000000000" pitchFamily="2" charset="0"/>
+              </a:rPr>
+              <a:t>Наблюдаем</a:t>
+            </a:r>
+            <a:r>
+              <a:rPr lang="en-US" sz="1200" b="1" dirty="0">
+                <a:latin typeface="Roboto" panose="02000000000000000000" pitchFamily="2" charset="0"/>
+                <a:ea typeface="Roboto" panose="02000000000000000000" pitchFamily="2" charset="0"/>
+                <a:cs typeface="Roboto" panose="02000000000000000000" pitchFamily="2" charset="0"/>
+              </a:rPr>
+              <a:t> 3.8</a:t>
+            </a:r>
+            <a:r>
+              <a:rPr lang="ru-RU" sz="1200" b="1" dirty="0">
+                <a:latin typeface="Roboto" panose="02000000000000000000" pitchFamily="2" charset="0"/>
+                <a:ea typeface="Roboto" panose="02000000000000000000" pitchFamily="2" charset="0"/>
+                <a:cs typeface="Roboto" panose="02000000000000000000" pitchFamily="2" charset="0"/>
+              </a:rPr>
+              <a:t>секунд потерь траффика в сценарии «обрыв </a:t>
+            </a:r>
+            <a:r>
+              <a:rPr lang="ru-RU" sz="1200" b="1" dirty="0" err="1">
+                <a:latin typeface="Roboto" panose="02000000000000000000" pitchFamily="2" charset="0"/>
+                <a:ea typeface="Roboto" panose="02000000000000000000" pitchFamily="2" charset="0"/>
+                <a:cs typeface="Roboto" panose="02000000000000000000" pitchFamily="2" charset="0"/>
+              </a:rPr>
+              <a:t>линка</a:t>
+            </a:r>
+            <a:r>
+              <a:rPr lang="ru-RU" sz="1200" b="1" dirty="0">
+                <a:latin typeface="Roboto" panose="02000000000000000000" pitchFamily="2" charset="0"/>
+                <a:ea typeface="Roboto" panose="02000000000000000000" pitchFamily="2" charset="0"/>
+                <a:cs typeface="Roboto" panose="02000000000000000000" pitchFamily="2" charset="0"/>
+              </a:rPr>
+              <a:t> </a:t>
+            </a:r>
+            <a:r>
+              <a:rPr lang="en-US" sz="1200" b="1" dirty="0">
+                <a:latin typeface="Roboto" panose="02000000000000000000" pitchFamily="2" charset="0"/>
+                <a:ea typeface="Roboto" panose="02000000000000000000" pitchFamily="2" charset="0"/>
+                <a:cs typeface="Roboto" panose="02000000000000000000" pitchFamily="2" charset="0"/>
+              </a:rPr>
+              <a:t>Leaf-</a:t>
+            </a:r>
+            <a:r>
+              <a:rPr lang="ru-RU" sz="1200" b="1" dirty="0">
+                <a:latin typeface="Roboto" panose="02000000000000000000" pitchFamily="2" charset="0"/>
+                <a:ea typeface="Roboto" panose="02000000000000000000" pitchFamily="2" charset="0"/>
+                <a:cs typeface="Roboto" panose="02000000000000000000" pitchFamily="2" charset="0"/>
+              </a:rPr>
+              <a:t>клиент», </a:t>
+            </a:r>
+          </a:p>
+          <a:p>
+            <a:r>
+              <a:rPr lang="ru-RU" sz="1200" b="1" dirty="0">
+                <a:latin typeface="Roboto" panose="02000000000000000000" pitchFamily="2" charset="0"/>
+                <a:ea typeface="Roboto" panose="02000000000000000000" pitchFamily="2" charset="0"/>
+                <a:cs typeface="Roboto" panose="02000000000000000000" pitchFamily="2" charset="0"/>
+              </a:rPr>
+              <a:t>после чего траффик восстанавливается автоматически</a:t>
+            </a:r>
           </a:p>
         </p:txBody>
       </p:sp>
@@ -11891,6 +11900,179 @@
           </a:p>
         </p:txBody>
       </p:sp>
+      <p:pic>
+        <p:nvPicPr>
+          <p:cNvPr id="3" name="Рисунок 2">
+            <a:extLst>
+              <a:ext uri="{FF2B5EF4-FFF2-40B4-BE49-F238E27FC236}">
+                <a16:creationId xmlns:a16="http://schemas.microsoft.com/office/drawing/2014/main" id="{869C46C2-A58B-4CBE-A240-F0B0DF9B731D}"/>
+              </a:ext>
+            </a:extLst>
+          </p:cNvPr>
+          <p:cNvPicPr>
+            <a:picLocks noChangeAspect="1"/>
+          </p:cNvPicPr>
+          <p:nvPr/>
+        </p:nvPicPr>
+        <p:blipFill>
+          <a:blip r:embed="rId3"/>
+          <a:stretch>
+            <a:fillRect/>
+          </a:stretch>
+        </p:blipFill>
+        <p:spPr>
+          <a:xfrm>
+            <a:off x="40425" y="1821601"/>
+            <a:ext cx="9063150" cy="2708051"/>
+          </a:xfrm>
+          <a:prstGeom prst="rect">
+            <a:avLst/>
+          </a:prstGeom>
+        </p:spPr>
+      </p:pic>
+      <p:sp>
+        <p:nvSpPr>
+          <p:cNvPr id="5" name="TextBox 4">
+            <a:extLst>
+              <a:ext uri="{FF2B5EF4-FFF2-40B4-BE49-F238E27FC236}">
+                <a16:creationId xmlns:a16="http://schemas.microsoft.com/office/drawing/2014/main" id="{1E239E53-94FF-4855-95C7-BB154CE2C648}"/>
+              </a:ext>
+            </a:extLst>
+          </p:cNvPr>
+          <p:cNvSpPr txBox="1"/>
+          <p:nvPr/>
+        </p:nvSpPr>
+        <p:spPr>
+          <a:xfrm>
+            <a:off x="407725" y="1426624"/>
+            <a:ext cx="8863324" cy="276999"/>
+          </a:xfrm>
+          <a:prstGeom prst="rect">
+            <a:avLst/>
+          </a:prstGeom>
+          <a:noFill/>
+        </p:spPr>
+        <p:txBody>
+          <a:bodyPr wrap="none" rtlCol="0">
+            <a:spAutoFit/>
+          </a:bodyPr>
+          <a:lstStyle/>
+          <a:p>
+            <a:r>
+              <a:rPr lang="ru-RU" sz="1200" b="1" dirty="0">
+                <a:latin typeface="Roboto" panose="02000000000000000000" pitchFamily="2" charset="0"/>
+                <a:ea typeface="Roboto" panose="02000000000000000000" pitchFamily="2" charset="0"/>
+                <a:cs typeface="Roboto" panose="02000000000000000000" pitchFamily="2" charset="0"/>
+              </a:rPr>
+              <a:t>Запускаем </a:t>
+            </a:r>
+            <a:r>
+              <a:rPr lang="en-US" sz="1200" b="1" dirty="0">
+                <a:latin typeface="Roboto" panose="02000000000000000000" pitchFamily="2" charset="0"/>
+                <a:ea typeface="Roboto" panose="02000000000000000000" pitchFamily="2" charset="0"/>
+                <a:cs typeface="Roboto" panose="02000000000000000000" pitchFamily="2" charset="0"/>
+              </a:rPr>
+              <a:t>ping</a:t>
+            </a:r>
+            <a:r>
+              <a:rPr lang="ru-RU" sz="1200" b="1" dirty="0">
+                <a:latin typeface="Roboto" panose="02000000000000000000" pitchFamily="2" charset="0"/>
+                <a:ea typeface="Roboto" panose="02000000000000000000" pitchFamily="2" charset="0"/>
+                <a:cs typeface="Roboto" panose="02000000000000000000" pitchFamily="2" charset="0"/>
+              </a:rPr>
+              <a:t> из </a:t>
+            </a:r>
+            <a:r>
+              <a:rPr lang="en-US" sz="1200" b="1" dirty="0">
+                <a:latin typeface="Roboto" panose="02000000000000000000" pitchFamily="2" charset="0"/>
+                <a:ea typeface="Roboto" panose="02000000000000000000" pitchFamily="2" charset="0"/>
+                <a:cs typeface="Roboto" panose="02000000000000000000" pitchFamily="2" charset="0"/>
+              </a:rPr>
+              <a:t>site2</a:t>
+            </a:r>
+            <a:r>
+              <a:rPr lang="ru-RU" sz="1200" b="1" dirty="0">
+                <a:latin typeface="Roboto" panose="02000000000000000000" pitchFamily="2" charset="0"/>
+                <a:ea typeface="Roboto" panose="02000000000000000000" pitchFamily="2" charset="0"/>
+                <a:cs typeface="Roboto" panose="02000000000000000000" pitchFamily="2" charset="0"/>
+              </a:rPr>
+              <a:t> в </a:t>
+            </a:r>
+            <a:r>
+              <a:rPr lang="en-US" sz="1200" b="1" dirty="0">
+                <a:latin typeface="Roboto" panose="02000000000000000000" pitchFamily="2" charset="0"/>
+                <a:ea typeface="Roboto" panose="02000000000000000000" pitchFamily="2" charset="0"/>
+                <a:cs typeface="Roboto" panose="02000000000000000000" pitchFamily="2" charset="0"/>
+              </a:rPr>
+              <a:t>site1, o</a:t>
+            </a:r>
+            <a:r>
+              <a:rPr lang="ru-RU" sz="1200" b="1" dirty="0" err="1">
+                <a:latin typeface="Roboto" panose="02000000000000000000" pitchFamily="2" charset="0"/>
+                <a:ea typeface="Roboto" panose="02000000000000000000" pitchFamily="2" charset="0"/>
+                <a:cs typeface="Roboto" panose="02000000000000000000" pitchFamily="2" charset="0"/>
+              </a:rPr>
+              <a:t>тключаем</a:t>
+            </a:r>
+            <a:r>
+              <a:rPr lang="ru-RU" sz="1200" b="1" dirty="0">
+                <a:latin typeface="Roboto" panose="02000000000000000000" pitchFamily="2" charset="0"/>
+                <a:ea typeface="Roboto" panose="02000000000000000000" pitchFamily="2" charset="0"/>
+                <a:cs typeface="Roboto" panose="02000000000000000000" pitchFamily="2" charset="0"/>
+              </a:rPr>
+              <a:t> </a:t>
+            </a:r>
+            <a:r>
+              <a:rPr lang="en-US" sz="1200" b="1" dirty="0">
+                <a:latin typeface="Roboto" panose="02000000000000000000" pitchFamily="2" charset="0"/>
+                <a:ea typeface="Roboto" panose="02000000000000000000" pitchFamily="2" charset="0"/>
+                <a:cs typeface="Roboto" panose="02000000000000000000" pitchFamily="2" charset="0"/>
+              </a:rPr>
+              <a:t>BGW1-s1</a:t>
+            </a:r>
+            <a:r>
+              <a:rPr lang="ru-RU" sz="1200" b="1" dirty="0">
+                <a:latin typeface="Roboto" panose="02000000000000000000" pitchFamily="2" charset="0"/>
+                <a:ea typeface="Roboto" panose="02000000000000000000" pitchFamily="2" charset="0"/>
+                <a:cs typeface="Roboto" panose="02000000000000000000" pitchFamily="2" charset="0"/>
+              </a:rPr>
+              <a:t>, проверяем что на </a:t>
+            </a:r>
+            <a:r>
+              <a:rPr lang="en-US" sz="1200" b="1" dirty="0">
+                <a:latin typeface="Roboto" panose="02000000000000000000" pitchFamily="2" charset="0"/>
+                <a:ea typeface="Roboto" panose="02000000000000000000" pitchFamily="2" charset="0"/>
+                <a:cs typeface="Roboto" panose="02000000000000000000" pitchFamily="2" charset="0"/>
+              </a:rPr>
+              <a:t>Leaf </a:t>
+            </a:r>
+            <a:r>
+              <a:rPr lang="ru-RU" sz="1200" b="1" dirty="0">
+                <a:latin typeface="Roboto" panose="02000000000000000000" pitchFamily="2" charset="0"/>
+                <a:ea typeface="Roboto" panose="02000000000000000000" pitchFamily="2" charset="0"/>
+                <a:cs typeface="Roboto" panose="02000000000000000000" pitchFamily="2" charset="0"/>
+              </a:rPr>
+              <a:t>в </a:t>
+            </a:r>
+            <a:r>
+              <a:rPr lang="en-US" sz="1200" b="1" dirty="0">
+                <a:latin typeface="Roboto" panose="02000000000000000000" pitchFamily="2" charset="0"/>
+                <a:ea typeface="Roboto" panose="02000000000000000000" pitchFamily="2" charset="0"/>
+                <a:cs typeface="Roboto" panose="02000000000000000000" pitchFamily="2" charset="0"/>
+              </a:rPr>
+              <a:t>Site 2</a:t>
+            </a:r>
+            <a:r>
+              <a:rPr lang="ru-RU" sz="1200" b="1" dirty="0">
+                <a:latin typeface="Roboto" panose="02000000000000000000" pitchFamily="2" charset="0"/>
+                <a:ea typeface="Roboto" panose="02000000000000000000" pitchFamily="2" charset="0"/>
+                <a:cs typeface="Roboto" panose="02000000000000000000" pitchFamily="2" charset="0"/>
+              </a:rPr>
+              <a:t> остались необходимые маршруты</a:t>
+            </a:r>
+          </a:p>
+        </p:txBody>
+      </p:sp>
     </p:spTree>
     <p:extLst>
       <p:ext uri="{BB962C8B-B14F-4D97-AF65-F5344CB8AC3E}">
@@ -11913,6 +12095,329 @@
 </file>
 
 <file path=ppt/slides/slide18.xml><?xml version="1.0" encoding="utf-8"?>
+<p:sld xmlns:a="http://schemas.openxmlformats.org/drawingml/2006/main" xmlns:r="http://schemas.openxmlformats.org/officeDocument/2006/relationships" xmlns:p="http://schemas.openxmlformats.org/presentationml/2006/main">
+  <p:cSld>
+    <p:spTree>
+      <p:nvGrpSpPr>
+        <p:cNvPr id="1" name=""/>
+        <p:cNvGrpSpPr/>
+        <p:nvPr/>
+      </p:nvGrpSpPr>
+      <p:grpSpPr>
+        <a:xfrm>
+          <a:off x="0" y="0"/>
+          <a:ext cx="0" cy="0"/>
+          <a:chOff x="0" y="0"/>
+          <a:chExt cx="0" cy="0"/>
+        </a:xfrm>
+      </p:grpSpPr>
+      <p:sp>
+        <p:nvSpPr>
+          <p:cNvPr id="2" name="Заголовок 1">
+            <a:extLst>
+              <a:ext uri="{FF2B5EF4-FFF2-40B4-BE49-F238E27FC236}">
+                <a16:creationId xmlns:a16="http://schemas.microsoft.com/office/drawing/2014/main" id="{385B32E5-230C-1808-EA27-36C6FBFAA19D}"/>
+              </a:ext>
+            </a:extLst>
+          </p:cNvPr>
+          <p:cNvSpPr>
+            <a:spLocks noGrp="1"/>
+          </p:cNvSpPr>
+          <p:nvPr>
+            <p:ph type="title"/>
+          </p:nvPr>
+        </p:nvSpPr>
+        <p:spPr/>
+        <p:txBody>
+          <a:bodyPr/>
+          <a:lstStyle/>
+          <a:p>
+            <a:r>
+              <a:rPr lang="ru-RU" dirty="0"/>
+              <a:t>Проверка работоспособности</a:t>
+            </a:r>
+            <a:br>
+              <a:rPr lang="ru-RU" dirty="0"/>
+            </a:br>
+            <a:endParaRPr lang="ru-RU" sz="1600" dirty="0"/>
+          </a:p>
+        </p:txBody>
+      </p:sp>
+      <p:sp>
+        <p:nvSpPr>
+          <p:cNvPr id="9" name="TextBox 8">
+            <a:extLst>
+              <a:ext uri="{FF2B5EF4-FFF2-40B4-BE49-F238E27FC236}">
+                <a16:creationId xmlns:a16="http://schemas.microsoft.com/office/drawing/2014/main" id="{665A4C07-328B-E7F2-39BD-6C8D3CAD65D3}"/>
+              </a:ext>
+            </a:extLst>
+          </p:cNvPr>
+          <p:cNvSpPr txBox="1"/>
+          <p:nvPr/>
+        </p:nvSpPr>
+        <p:spPr>
+          <a:xfrm>
+            <a:off x="705971" y="878674"/>
+            <a:ext cx="4733988" cy="584775"/>
+          </a:xfrm>
+          <a:prstGeom prst="rect">
+            <a:avLst/>
+          </a:prstGeom>
+          <a:noFill/>
+        </p:spPr>
+        <p:txBody>
+          <a:bodyPr wrap="none" rtlCol="0">
+            <a:spAutoFit/>
+          </a:bodyPr>
+          <a:lstStyle/>
+          <a:p>
+            <a:r>
+              <a:rPr lang="ru-RU" sz="1800" b="1" dirty="0">
+                <a:latin typeface="Roboto" panose="02000000000000000000" pitchFamily="2" charset="0"/>
+                <a:ea typeface="Roboto" panose="02000000000000000000" pitchFamily="2" charset="0"/>
+                <a:cs typeface="Roboto" panose="02000000000000000000" pitchFamily="2" charset="0"/>
+              </a:rPr>
+              <a:t>Проверка отказоустойчивости </a:t>
+            </a:r>
+            <a:r>
+              <a:rPr lang="en-US" sz="1800" b="1" i="1" dirty="0" err="1">
+                <a:latin typeface="Roboto" panose="02000000000000000000" pitchFamily="2" charset="0"/>
+                <a:ea typeface="Roboto" panose="02000000000000000000" pitchFamily="2" charset="0"/>
+                <a:cs typeface="Roboto" panose="02000000000000000000" pitchFamily="2" charset="0"/>
+              </a:rPr>
+              <a:t>BorderLeaf</a:t>
+            </a:r>
+            <a:endParaRPr lang="en-US" sz="1800" b="1" dirty="0">
+              <a:latin typeface="Roboto" panose="02000000000000000000" pitchFamily="2" charset="0"/>
+              <a:ea typeface="Roboto" panose="02000000000000000000" pitchFamily="2" charset="0"/>
+              <a:cs typeface="Roboto" panose="02000000000000000000" pitchFamily="2" charset="0"/>
+            </a:endParaRPr>
+          </a:p>
+          <a:p>
+            <a:endParaRPr lang="ru-RU" dirty="0"/>
+          </a:p>
+        </p:txBody>
+      </p:sp>
+      <p:pic>
+        <p:nvPicPr>
+          <p:cNvPr id="3" name="Рисунок 2">
+            <a:extLst>
+              <a:ext uri="{FF2B5EF4-FFF2-40B4-BE49-F238E27FC236}">
+                <a16:creationId xmlns:a16="http://schemas.microsoft.com/office/drawing/2014/main" id="{C5E36755-96B4-41BB-9F23-E027E9B37BC5}"/>
+              </a:ext>
+            </a:extLst>
+          </p:cNvPr>
+          <p:cNvPicPr>
+            <a:picLocks noChangeAspect="1"/>
+          </p:cNvPicPr>
+          <p:nvPr/>
+        </p:nvPicPr>
+        <p:blipFill>
+          <a:blip r:embed="rId3"/>
+          <a:stretch>
+            <a:fillRect/>
+          </a:stretch>
+        </p:blipFill>
+        <p:spPr>
+          <a:xfrm>
+            <a:off x="500550" y="1718216"/>
+            <a:ext cx="4373433" cy="2546610"/>
+          </a:xfrm>
+          <a:prstGeom prst="rect">
+            <a:avLst/>
+          </a:prstGeom>
+        </p:spPr>
+      </p:pic>
+      <p:sp>
+        <p:nvSpPr>
+          <p:cNvPr id="5" name="TextBox 4">
+            <a:extLst>
+              <a:ext uri="{FF2B5EF4-FFF2-40B4-BE49-F238E27FC236}">
+                <a16:creationId xmlns:a16="http://schemas.microsoft.com/office/drawing/2014/main" id="{F5A952EB-CC2F-4899-923E-C83702DE2D57}"/>
+              </a:ext>
+            </a:extLst>
+          </p:cNvPr>
+          <p:cNvSpPr txBox="1"/>
+          <p:nvPr/>
+        </p:nvSpPr>
+        <p:spPr>
+          <a:xfrm>
+            <a:off x="417430" y="1256551"/>
+            <a:ext cx="5311069" cy="461665"/>
+          </a:xfrm>
+          <a:prstGeom prst="rect">
+            <a:avLst/>
+          </a:prstGeom>
+          <a:noFill/>
+        </p:spPr>
+        <p:txBody>
+          <a:bodyPr wrap="none" rtlCol="0">
+            <a:spAutoFit/>
+          </a:bodyPr>
+          <a:lstStyle/>
+          <a:p>
+            <a:r>
+              <a:rPr lang="ru-RU" sz="1200" b="1" dirty="0">
+                <a:latin typeface="Roboto" panose="02000000000000000000" pitchFamily="2" charset="0"/>
+                <a:ea typeface="Roboto" panose="02000000000000000000" pitchFamily="2" charset="0"/>
+                <a:cs typeface="Roboto" panose="02000000000000000000" pitchFamily="2" charset="0"/>
+              </a:rPr>
+              <a:t>Наблюдаем потери траффика в сценарии отказа «Отключение </a:t>
+            </a:r>
+            <a:r>
+              <a:rPr lang="en-US" sz="1200" b="1" dirty="0">
+                <a:latin typeface="Roboto" panose="02000000000000000000" pitchFamily="2" charset="0"/>
+                <a:ea typeface="Roboto" panose="02000000000000000000" pitchFamily="2" charset="0"/>
+                <a:cs typeface="Roboto" panose="02000000000000000000" pitchFamily="2" charset="0"/>
+              </a:rPr>
+              <a:t>BGW</a:t>
+            </a:r>
+            <a:r>
+              <a:rPr lang="ru-RU" sz="1200" b="1" dirty="0">
+                <a:latin typeface="Roboto" panose="02000000000000000000" pitchFamily="2" charset="0"/>
+                <a:ea typeface="Roboto" panose="02000000000000000000" pitchFamily="2" charset="0"/>
+                <a:cs typeface="Roboto" panose="02000000000000000000" pitchFamily="2" charset="0"/>
+              </a:rPr>
+              <a:t>». </a:t>
+            </a:r>
+          </a:p>
+          <a:p>
+            <a:r>
+              <a:rPr lang="ru-RU" sz="1200" b="1" dirty="0">
+                <a:latin typeface="Roboto" panose="02000000000000000000" pitchFamily="2" charset="0"/>
+                <a:ea typeface="Roboto" panose="02000000000000000000" pitchFamily="2" charset="0"/>
+                <a:cs typeface="Roboto" panose="02000000000000000000" pitchFamily="2" charset="0"/>
+              </a:rPr>
+              <a:t>Для примера </a:t>
+            </a:r>
+            <a:r>
+              <a:rPr lang="en-US" sz="1200" b="1" dirty="0">
+                <a:latin typeface="Roboto" panose="02000000000000000000" pitchFamily="2" charset="0"/>
+                <a:ea typeface="Roboto" panose="02000000000000000000" pitchFamily="2" charset="0"/>
+                <a:cs typeface="Roboto" panose="02000000000000000000" pitchFamily="2" charset="0"/>
+              </a:rPr>
+              <a:t>ping </a:t>
+            </a:r>
+            <a:r>
+              <a:rPr lang="ru-RU" sz="1200" b="1" dirty="0">
+                <a:latin typeface="Roboto" panose="02000000000000000000" pitchFamily="2" charset="0"/>
+                <a:ea typeface="Roboto" panose="02000000000000000000" pitchFamily="2" charset="0"/>
+                <a:cs typeface="Roboto" panose="02000000000000000000" pitchFamily="2" charset="0"/>
+              </a:rPr>
+              <a:t>с </a:t>
+            </a:r>
+            <a:r>
+              <a:rPr lang="en-US" sz="1200" b="1" dirty="0">
+                <a:latin typeface="Roboto" panose="02000000000000000000" pitchFamily="2" charset="0"/>
+                <a:ea typeface="Roboto" panose="02000000000000000000" pitchFamily="2" charset="0"/>
+                <a:cs typeface="Roboto" panose="02000000000000000000" pitchFamily="2" charset="0"/>
+              </a:rPr>
+              <a:t>CE3-s2</a:t>
+            </a:r>
+            <a:r>
+              <a:rPr lang="ru-RU" sz="1200" b="1" dirty="0">
+                <a:latin typeface="Roboto" panose="02000000000000000000" pitchFamily="2" charset="0"/>
+                <a:ea typeface="Roboto" panose="02000000000000000000" pitchFamily="2" charset="0"/>
+                <a:cs typeface="Roboto" panose="02000000000000000000" pitchFamily="2" charset="0"/>
+              </a:rPr>
+              <a:t> до </a:t>
+            </a:r>
+            <a:r>
+              <a:rPr lang="en-US" sz="1200" b="1" dirty="0">
+                <a:latin typeface="Roboto" panose="02000000000000000000" pitchFamily="2" charset="0"/>
+                <a:ea typeface="Roboto" panose="02000000000000000000" pitchFamily="2" charset="0"/>
+                <a:cs typeface="Roboto" panose="02000000000000000000" pitchFamily="2" charset="0"/>
+              </a:rPr>
+              <a:t>CE3-s1</a:t>
+            </a:r>
+            <a:r>
+              <a:rPr lang="ru-RU" sz="1200" b="1" dirty="0">
+                <a:latin typeface="Roboto" panose="02000000000000000000" pitchFamily="2" charset="0"/>
+                <a:ea typeface="Roboto" panose="02000000000000000000" pitchFamily="2" charset="0"/>
+                <a:cs typeface="Roboto" panose="02000000000000000000" pitchFamily="2" charset="0"/>
+              </a:rPr>
+              <a:t>:</a:t>
+            </a:r>
+          </a:p>
+        </p:txBody>
+      </p:sp>
+      <p:sp>
+        <p:nvSpPr>
+          <p:cNvPr id="6" name="TextBox 5">
+            <a:extLst>
+              <a:ext uri="{FF2B5EF4-FFF2-40B4-BE49-F238E27FC236}">
+                <a16:creationId xmlns:a16="http://schemas.microsoft.com/office/drawing/2014/main" id="{B9906883-20F4-4164-9EFA-EAEBAF6CB20D}"/>
+              </a:ext>
+            </a:extLst>
+          </p:cNvPr>
+          <p:cNvSpPr txBox="1"/>
+          <p:nvPr/>
+        </p:nvSpPr>
+        <p:spPr>
+          <a:xfrm>
+            <a:off x="407725" y="4427777"/>
+            <a:ext cx="3307316" cy="276999"/>
+          </a:xfrm>
+          <a:prstGeom prst="rect">
+            <a:avLst/>
+          </a:prstGeom>
+          <a:noFill/>
+        </p:spPr>
+        <p:txBody>
+          <a:bodyPr wrap="none" rtlCol="0">
+            <a:spAutoFit/>
+          </a:bodyPr>
+          <a:lstStyle/>
+          <a:p>
+            <a:r>
+              <a:rPr lang="ru-RU" sz="1200" b="1" dirty="0">
+                <a:latin typeface="Roboto" panose="02000000000000000000" pitchFamily="2" charset="0"/>
+                <a:ea typeface="Roboto" panose="02000000000000000000" pitchFamily="2" charset="0"/>
+                <a:cs typeface="Roboto" panose="02000000000000000000" pitchFamily="2" charset="0"/>
+              </a:rPr>
+              <a:t>Потери траффика составили </a:t>
+            </a:r>
+            <a:r>
+              <a:rPr lang="en-US" sz="1200" b="1" dirty="0">
+                <a:latin typeface="Roboto" panose="02000000000000000000" pitchFamily="2" charset="0"/>
+                <a:ea typeface="Roboto" panose="02000000000000000000" pitchFamily="2" charset="0"/>
+                <a:cs typeface="Roboto" panose="02000000000000000000" pitchFamily="2" charset="0"/>
+              </a:rPr>
+              <a:t>~158</a:t>
+            </a:r>
+            <a:r>
+              <a:rPr lang="ru-RU" sz="1200" b="1" dirty="0">
+                <a:latin typeface="Roboto" panose="02000000000000000000" pitchFamily="2" charset="0"/>
+                <a:ea typeface="Roboto" panose="02000000000000000000" pitchFamily="2" charset="0"/>
+                <a:cs typeface="Roboto" panose="02000000000000000000" pitchFamily="2" charset="0"/>
+              </a:rPr>
+              <a:t> секунд. </a:t>
+            </a:r>
+          </a:p>
+        </p:txBody>
+      </p:sp>
+    </p:spTree>
+    <p:extLst>
+      <p:ext uri="{BB962C8B-B14F-4D97-AF65-F5344CB8AC3E}">
+        <p14:creationId xmlns:p14="http://schemas.microsoft.com/office/powerpoint/2010/main" val="2887562433"/>
+      </p:ext>
+    </p:extLst>
+  </p:cSld>
+  <p:clrMapOvr>
+    <a:masterClrMapping/>
+  </p:clrMapOvr>
+  <mc:AlternateContent xmlns:mc="http://schemas.openxmlformats.org/markup-compatibility/2006" xmlns:p14="http://schemas.microsoft.com/office/powerpoint/2010/main">
+    <mc:Choice Requires="p14">
+      <p:transition spd="slow" p14:dur="3000"/>
+    </mc:Choice>
+    <mc:Fallback xmlns="">
+      <p:transition spd="slow"/>
+    </mc:Fallback>
+  </mc:AlternateContent>
+</p:sld>
+</file>
+
+<file path=ppt/slides/slide19.xml><?xml version="1.0" encoding="utf-8"?>
 <p:sld xmlns:a="http://schemas.openxmlformats.org/drawingml/2006/main" xmlns:r="http://schemas.openxmlformats.org/officeDocument/2006/relationships" xmlns:p="http://schemas.openxmlformats.org/presentationml/2006/main">
   <p:cSld>
     <p:spTree>
@@ -12098,185 +12603,6 @@
     <p:extLst>
       <p:ext uri="{BB962C8B-B14F-4D97-AF65-F5344CB8AC3E}">
         <p14:creationId xmlns:p14="http://schemas.microsoft.com/office/powerpoint/2010/main" val="939443583"/>
-      </p:ext>
-    </p:extLst>
-  </p:cSld>
-  <p:clrMapOvr>
-    <a:masterClrMapping/>
-  </p:clrMapOvr>
-  <mc:AlternateContent xmlns:mc="http://schemas.openxmlformats.org/markup-compatibility/2006" xmlns:p14="http://schemas.microsoft.com/office/powerpoint/2010/main">
-    <mc:Choice Requires="p14">
-      <p:transition spd="slow" p14:dur="3000"/>
-    </mc:Choice>
-    <mc:Fallback xmlns="">
-      <p:transition spd="slow"/>
-    </mc:Fallback>
-  </mc:AlternateContent>
-</p:sld>
-</file>
-
-<file path=ppt/slides/slide19.xml><?xml version="1.0" encoding="utf-8"?>
-<p:sld xmlns:a="http://schemas.openxmlformats.org/drawingml/2006/main" xmlns:r="http://schemas.openxmlformats.org/officeDocument/2006/relationships" xmlns:p="http://schemas.openxmlformats.org/presentationml/2006/main">
-  <p:cSld>
-    <p:spTree>
-      <p:nvGrpSpPr>
-        <p:cNvPr id="1" name=""/>
-        <p:cNvGrpSpPr/>
-        <p:nvPr/>
-      </p:nvGrpSpPr>
-      <p:grpSpPr>
-        <a:xfrm>
-          <a:off x="0" y="0"/>
-          <a:ext cx="0" cy="0"/>
-          <a:chOff x="0" y="0"/>
-          <a:chExt cx="0" cy="0"/>
-        </a:xfrm>
-      </p:grpSpPr>
-      <p:sp>
-        <p:nvSpPr>
-          <p:cNvPr id="2" name="Заголовок 1">
-            <a:extLst>
-              <a:ext uri="{FF2B5EF4-FFF2-40B4-BE49-F238E27FC236}">
-                <a16:creationId xmlns:a16="http://schemas.microsoft.com/office/drawing/2014/main" id="{F1C0A587-D1DD-B956-BFEF-8BC6F1632BFC}"/>
-              </a:ext>
-            </a:extLst>
-          </p:cNvPr>
-          <p:cNvSpPr>
-            <a:spLocks noGrp="1"/>
-          </p:cNvSpPr>
-          <p:nvPr>
-            <p:ph type="title"/>
-          </p:nvPr>
-        </p:nvSpPr>
-        <p:spPr/>
-        <p:txBody>
-          <a:bodyPr/>
-          <a:lstStyle/>
-          <a:p>
-            <a:r>
-              <a:rPr lang="ru-RU" dirty="0"/>
-              <a:t>Выводы и заключение</a:t>
-            </a:r>
-            <a:br>
-              <a:rPr lang="ru-RU" dirty="0"/>
-            </a:br>
-            <a:endParaRPr lang="ru-RU" dirty="0"/>
-          </a:p>
-        </p:txBody>
-      </p:sp>
-      <p:sp>
-        <p:nvSpPr>
-          <p:cNvPr id="3" name="Текст 2">
-            <a:extLst>
-              <a:ext uri="{FF2B5EF4-FFF2-40B4-BE49-F238E27FC236}">
-                <a16:creationId xmlns:a16="http://schemas.microsoft.com/office/drawing/2014/main" id="{E933D0AD-EC68-70DB-FB02-3DDE185DAC70}"/>
-              </a:ext>
-            </a:extLst>
-          </p:cNvPr>
-          <p:cNvSpPr>
-            <a:spLocks noGrp="1"/>
-          </p:cNvSpPr>
-          <p:nvPr>
-            <p:ph type="body" idx="1"/>
-          </p:nvPr>
-        </p:nvSpPr>
-        <p:spPr>
-          <a:xfrm>
-            <a:off x="500550" y="1021976"/>
-            <a:ext cx="8520600" cy="3820893"/>
-          </a:xfrm>
-        </p:spPr>
-        <p:txBody>
-          <a:bodyPr/>
-          <a:lstStyle/>
-          <a:p>
-            <a:pPr marL="133350" indent="0">
-              <a:buNone/>
-            </a:pPr>
-            <a:r>
-              <a:rPr lang="ru-RU" dirty="0"/>
-              <a:t>В ходе выполнения данной работы была спроектирована и реализована </a:t>
-            </a:r>
-            <a:r>
-              <a:rPr lang="ru-RU" dirty="0" err="1"/>
-              <a:t>мультисайтовая</a:t>
-            </a:r>
-            <a:r>
-              <a:rPr lang="ru-RU" dirty="0"/>
-              <a:t> сеть ЦОД на базе современных технологий EVPN и VXLAN.</a:t>
-            </a:r>
-          </a:p>
-          <a:p>
-            <a:r>
-              <a:rPr lang="ru-RU" b="1" dirty="0"/>
-              <a:t>Разработана масштабируемая архитектура </a:t>
-            </a:r>
-            <a:r>
-              <a:rPr lang="ru-RU" b="1" dirty="0" err="1"/>
-              <a:t>мультиподового</a:t>
-            </a:r>
-            <a:r>
-              <a:rPr lang="ru-RU" b="1" dirty="0"/>
-              <a:t> ЦОД</a:t>
-            </a:r>
-          </a:p>
-          <a:p>
-            <a:r>
-              <a:rPr lang="ru-RU" b="1" dirty="0"/>
-              <a:t>Реализован отказоустойчивый </a:t>
-            </a:r>
-            <a:r>
-              <a:rPr lang="ru-RU" b="1" dirty="0" err="1"/>
-              <a:t>underlay</a:t>
-            </a:r>
-            <a:r>
-              <a:rPr lang="ru-RU" b="1" dirty="0"/>
-              <a:t> на базе </a:t>
-            </a:r>
-            <a:r>
-              <a:rPr lang="en-US" b="1" dirty="0" err="1"/>
-              <a:t>eBGP</a:t>
-            </a:r>
-            <a:endParaRPr lang="en-US" b="1" dirty="0"/>
-          </a:p>
-          <a:p>
-            <a:r>
-              <a:rPr lang="ru-RU" b="1" dirty="0"/>
-              <a:t>Реализован </a:t>
-            </a:r>
-            <a:r>
-              <a:rPr lang="ru-RU" b="1" dirty="0" err="1"/>
-              <a:t>мультихоминг</a:t>
-            </a:r>
-            <a:r>
-              <a:rPr lang="ru-RU" b="1" dirty="0"/>
-              <a:t> (</a:t>
-            </a:r>
-            <a:r>
-              <a:rPr lang="en-US" b="1" dirty="0"/>
-              <a:t>EVPN Ethernet Segment)</a:t>
-            </a:r>
-            <a:endParaRPr lang="ru-RU" b="1" dirty="0"/>
-          </a:p>
-          <a:p>
-            <a:r>
-              <a:rPr lang="ru-RU" b="1" dirty="0"/>
-              <a:t>Организовано контролируемое межсайтовое взаимодействие</a:t>
-            </a:r>
-          </a:p>
-          <a:p>
-            <a:r>
-              <a:rPr lang="ru-RU" b="1" dirty="0"/>
-              <a:t>Подтверждена работоспособность и отказоустойчивость решения</a:t>
-            </a:r>
-            <a:endParaRPr lang="ru-RU" dirty="0"/>
-          </a:p>
-        </p:txBody>
-      </p:sp>
-    </p:spTree>
-    <p:extLst>
-      <p:ext uri="{BB962C8B-B14F-4D97-AF65-F5344CB8AC3E}">
-        <p14:creationId xmlns:p14="http://schemas.microsoft.com/office/powerpoint/2010/main" val="1263256525"/>
       </p:ext>
     </p:extLst>
   </p:cSld>
@@ -12586,6 +12912,185 @@
         </p:txBody>
       </p:sp>
     </p:spTree>
+  </p:cSld>
+  <p:clrMapOvr>
+    <a:masterClrMapping/>
+  </p:clrMapOvr>
+  <mc:AlternateContent xmlns:mc="http://schemas.openxmlformats.org/markup-compatibility/2006" xmlns:p14="http://schemas.microsoft.com/office/powerpoint/2010/main">
+    <mc:Choice Requires="p14">
+      <p:transition spd="slow" p14:dur="3000"/>
+    </mc:Choice>
+    <mc:Fallback xmlns="">
+      <p:transition spd="slow"/>
+    </mc:Fallback>
+  </mc:AlternateContent>
+</p:sld>
+</file>
+
+<file path=ppt/slides/slide20.xml><?xml version="1.0" encoding="utf-8"?>
+<p:sld xmlns:a="http://schemas.openxmlformats.org/drawingml/2006/main" xmlns:r="http://schemas.openxmlformats.org/officeDocument/2006/relationships" xmlns:p="http://schemas.openxmlformats.org/presentationml/2006/main">
+  <p:cSld>
+    <p:spTree>
+      <p:nvGrpSpPr>
+        <p:cNvPr id="1" name=""/>
+        <p:cNvGrpSpPr/>
+        <p:nvPr/>
+      </p:nvGrpSpPr>
+      <p:grpSpPr>
+        <a:xfrm>
+          <a:off x="0" y="0"/>
+          <a:ext cx="0" cy="0"/>
+          <a:chOff x="0" y="0"/>
+          <a:chExt cx="0" cy="0"/>
+        </a:xfrm>
+      </p:grpSpPr>
+      <p:sp>
+        <p:nvSpPr>
+          <p:cNvPr id="2" name="Заголовок 1">
+            <a:extLst>
+              <a:ext uri="{FF2B5EF4-FFF2-40B4-BE49-F238E27FC236}">
+                <a16:creationId xmlns:a16="http://schemas.microsoft.com/office/drawing/2014/main" id="{F1C0A587-D1DD-B956-BFEF-8BC6F1632BFC}"/>
+              </a:ext>
+            </a:extLst>
+          </p:cNvPr>
+          <p:cNvSpPr>
+            <a:spLocks noGrp="1"/>
+          </p:cNvSpPr>
+          <p:nvPr>
+            <p:ph type="title"/>
+          </p:nvPr>
+        </p:nvSpPr>
+        <p:spPr/>
+        <p:txBody>
+          <a:bodyPr/>
+          <a:lstStyle/>
+          <a:p>
+            <a:r>
+              <a:rPr lang="ru-RU" dirty="0"/>
+              <a:t>Выводы и заключение</a:t>
+            </a:r>
+            <a:br>
+              <a:rPr lang="ru-RU" dirty="0"/>
+            </a:br>
+            <a:endParaRPr lang="ru-RU" dirty="0"/>
+          </a:p>
+        </p:txBody>
+      </p:sp>
+      <p:sp>
+        <p:nvSpPr>
+          <p:cNvPr id="3" name="Текст 2">
+            <a:extLst>
+              <a:ext uri="{FF2B5EF4-FFF2-40B4-BE49-F238E27FC236}">
+                <a16:creationId xmlns:a16="http://schemas.microsoft.com/office/drawing/2014/main" id="{E933D0AD-EC68-70DB-FB02-3DDE185DAC70}"/>
+              </a:ext>
+            </a:extLst>
+          </p:cNvPr>
+          <p:cNvSpPr>
+            <a:spLocks noGrp="1"/>
+          </p:cNvSpPr>
+          <p:nvPr>
+            <p:ph type="body" idx="1"/>
+          </p:nvPr>
+        </p:nvSpPr>
+        <p:spPr>
+          <a:xfrm>
+            <a:off x="500550" y="1021976"/>
+            <a:ext cx="8520600" cy="3820893"/>
+          </a:xfrm>
+        </p:spPr>
+        <p:txBody>
+          <a:bodyPr/>
+          <a:lstStyle/>
+          <a:p>
+            <a:pPr marL="133350" indent="0">
+              <a:buNone/>
+            </a:pPr>
+            <a:r>
+              <a:rPr lang="ru-RU" dirty="0"/>
+              <a:t>В ходе выполнения данной работы была спроектирована и реализована </a:t>
+            </a:r>
+            <a:r>
+              <a:rPr lang="ru-RU" dirty="0" err="1"/>
+              <a:t>мультисайтовая</a:t>
+            </a:r>
+            <a:r>
+              <a:rPr lang="ru-RU" dirty="0"/>
+              <a:t> сеть ЦОД на базе современных технологий EVPN и VXLAN.</a:t>
+            </a:r>
+          </a:p>
+          <a:p>
+            <a:r>
+              <a:rPr lang="ru-RU" b="1" dirty="0"/>
+              <a:t>Разработана масштабируемая архитектура </a:t>
+            </a:r>
+            <a:r>
+              <a:rPr lang="ru-RU" b="1" dirty="0" err="1"/>
+              <a:t>мультиподового</a:t>
+            </a:r>
+            <a:r>
+              <a:rPr lang="ru-RU" b="1" dirty="0"/>
+              <a:t> ЦОД</a:t>
+            </a:r>
+          </a:p>
+          <a:p>
+            <a:r>
+              <a:rPr lang="ru-RU" b="1" dirty="0"/>
+              <a:t>Реализован отказоустойчивый </a:t>
+            </a:r>
+            <a:r>
+              <a:rPr lang="ru-RU" b="1" dirty="0" err="1"/>
+              <a:t>underlay</a:t>
+            </a:r>
+            <a:r>
+              <a:rPr lang="ru-RU" b="1" dirty="0"/>
+              <a:t> на базе </a:t>
+            </a:r>
+            <a:r>
+              <a:rPr lang="en-US" b="1" dirty="0" err="1"/>
+              <a:t>eBGP</a:t>
+            </a:r>
+            <a:endParaRPr lang="en-US" b="1" dirty="0"/>
+          </a:p>
+          <a:p>
+            <a:r>
+              <a:rPr lang="ru-RU" b="1" dirty="0"/>
+              <a:t>Реализован </a:t>
+            </a:r>
+            <a:r>
+              <a:rPr lang="ru-RU" b="1" dirty="0" err="1"/>
+              <a:t>мультихоминг</a:t>
+            </a:r>
+            <a:r>
+              <a:rPr lang="ru-RU" b="1" dirty="0"/>
+              <a:t> (</a:t>
+            </a:r>
+            <a:r>
+              <a:rPr lang="en-US" b="1" dirty="0"/>
+              <a:t>EVPN Ethernet Segment)</a:t>
+            </a:r>
+            <a:endParaRPr lang="ru-RU" b="1" dirty="0"/>
+          </a:p>
+          <a:p>
+            <a:r>
+              <a:rPr lang="ru-RU" b="1" dirty="0"/>
+              <a:t>Организовано контролируемое межсайтовое взаимодействие</a:t>
+            </a:r>
+          </a:p>
+          <a:p>
+            <a:r>
+              <a:rPr lang="ru-RU" b="1" dirty="0"/>
+              <a:t>Подтверждена работоспособность и отказоустойчивость решения</a:t>
+            </a:r>
+            <a:endParaRPr lang="ru-RU" dirty="0"/>
+          </a:p>
+        </p:txBody>
+      </p:sp>
+    </p:spTree>
+    <p:extLst>
+      <p:ext uri="{BB962C8B-B14F-4D97-AF65-F5344CB8AC3E}">
+        <p14:creationId xmlns:p14="http://schemas.microsoft.com/office/powerpoint/2010/main" val="1263256525"/>
+      </p:ext>
+    </p:extLst>
   </p:cSld>
   <p:clrMapOvr>
     <a:masterClrMapping/>
@@ -14167,7 +14672,7 @@
                 <a:ea typeface="Roboto" panose="02000000000000000000" pitchFamily="2" charset="0"/>
                 <a:cs typeface="Roboto" panose="02000000000000000000" pitchFamily="2" charset="0"/>
               </a:rPr>
-              <a:t> (по 2 в каждом поде) — образуют ядро фабрики, соединяя все </a:t>
+              <a:t> (по 2 в каждом сайте) — образуют ядро фабрики, соединяя все </a:t>
             </a:r>
             <a:r>
               <a:rPr lang="ru-RU" dirty="0" err="1">
@@ -14261,7 +14766,7 @@
                 <a:ea typeface="Roboto" panose="02000000000000000000" pitchFamily="2" charset="0"/>
                 <a:cs typeface="Roboto" panose="02000000000000000000" pitchFamily="2" charset="0"/>
               </a:rPr>
-              <a:t> (по 4 в каждом поде) — к ним подключаются серверы и пограничные маршрутизаторы.</a:t>
+              <a:t> (по 4 в каждом сайте) — к ним подключаются серверы и пограничные маршрутизаторы.</a:t>
             </a:r>
           </a:p>
           <a:p>
@@ -14555,8 +15060,8 @@
         </p:nvSpPr>
         <p:spPr>
           <a:xfrm>
-            <a:off x="742278" y="1042511"/>
-            <a:ext cx="8046720" cy="2677656"/>
+            <a:off x="742278" y="1232922"/>
+            <a:ext cx="8046720" cy="738664"/>
           </a:xfrm>
           <a:prstGeom prst="rect">
             <a:avLst/>
@@ -14582,12 +15087,20 @@
               <a:t>Используется </a:t>
             </a:r>
             <a:r>
+              <a:rPr lang="en-US" dirty="0" err="1">
+                <a:latin typeface="Roboto" panose="02000000000000000000" pitchFamily="2" charset="0"/>
+                <a:ea typeface="Roboto" panose="02000000000000000000" pitchFamily="2" charset="0"/>
+                <a:cs typeface="Roboto" panose="02000000000000000000" pitchFamily="2" charset="0"/>
+              </a:rPr>
+              <a:t>eBGP</a:t>
+            </a:r>
+            <a:r>
               <a:rPr lang="en-US" dirty="0">
                 <a:latin typeface="Roboto" panose="02000000000000000000" pitchFamily="2" charset="0"/>
                 <a:ea typeface="Roboto" panose="02000000000000000000" pitchFamily="2" charset="0"/>
                 <a:cs typeface="Roboto" panose="02000000000000000000" pitchFamily="2" charset="0"/>
               </a:rPr>
-              <a:t>iBGP </a:t>
+              <a:t> </a:t>
             </a:r>
             <a:r>
               <a:rPr lang="ru-RU" dirty="0">
@@ -14595,31 +15108,7 @@
                 <a:ea typeface="Roboto" panose="02000000000000000000" pitchFamily="2" charset="0"/>
                 <a:cs typeface="Roboto" panose="02000000000000000000" pitchFamily="2" charset="0"/>
               </a:rPr>
-              <a:t>внутри каждого пода (</a:t>
-            </a:r>
-            <a:r>
-              <a:rPr lang="en-US" dirty="0">
-                <a:latin typeface="Roboto" panose="02000000000000000000" pitchFamily="2" charset="0"/>
-                <a:ea typeface="Roboto" panose="02000000000000000000" pitchFamily="2" charset="0"/>
-                <a:cs typeface="Roboto" panose="02000000000000000000" pitchFamily="2" charset="0"/>
-              </a:rPr>
-              <a:t>remote-as </a:t>
-            </a:r>
-            <a:r>
-              <a:rPr lang="ru-RU" dirty="0">
-                <a:latin typeface="Roboto" panose="02000000000000000000" pitchFamily="2" charset="0"/>
-                <a:ea typeface="Roboto" panose="02000000000000000000" pitchFamily="2" charset="0"/>
-                <a:cs typeface="Roboto" panose="02000000000000000000" pitchFamily="2" charset="0"/>
-              </a:rPr>
-              <a:t>совпадает с собственным номером </a:t>
-            </a:r>
-            <a:r>
-              <a:rPr lang="en-US" dirty="0">
-                <a:latin typeface="Roboto" panose="02000000000000000000" pitchFamily="2" charset="0"/>
-                <a:ea typeface="Roboto" panose="02000000000000000000" pitchFamily="2" charset="0"/>
-                <a:cs typeface="Roboto" panose="02000000000000000000" pitchFamily="2" charset="0"/>
-              </a:rPr>
-              <a:t>AS).</a:t>
+              <a:t>внутри каждого сайта</a:t>
             </a:r>
           </a:p>
           <a:p>
@@ -14628,36 +15117,12 @@
               <a:buChar char="•"/>
             </a:pPr>
             <a:r>
-              <a:rPr lang="en-US" dirty="0">
-                <a:latin typeface="Roboto" panose="02000000000000000000" pitchFamily="2" charset="0"/>
-                <a:ea typeface="Roboto" panose="02000000000000000000" pitchFamily="2" charset="0"/>
-                <a:cs typeface="Roboto" panose="02000000000000000000" pitchFamily="2" charset="0"/>
-              </a:rPr>
-              <a:t>BGP-</a:t>
-            </a:r>
-            <a:r>
               <a:rPr lang="ru-RU" dirty="0">
                 <a:latin typeface="Roboto" panose="02000000000000000000" pitchFamily="2" charset="0"/>
                 <a:ea typeface="Roboto" panose="02000000000000000000" pitchFamily="2" charset="0"/>
                 <a:cs typeface="Roboto" panose="02000000000000000000" pitchFamily="2" charset="0"/>
               </a:rPr>
-              <a:t>сессии устанавливаются через </a:t>
-            </a:r>
-            <a:r>
-              <a:rPr lang="en-US" dirty="0">
-                <a:latin typeface="Roboto" panose="02000000000000000000" pitchFamily="2" charset="0"/>
-                <a:ea typeface="Roboto" panose="02000000000000000000" pitchFamily="2" charset="0"/>
-                <a:cs typeface="Roboto" panose="02000000000000000000" pitchFamily="2" charset="0"/>
-              </a:rPr>
-              <a:t>IPv6 link-local </a:t>
-            </a:r>
-            <a:r>
-              <a:rPr lang="ru-RU" dirty="0">
-                <a:latin typeface="Roboto" panose="02000000000000000000" pitchFamily="2" charset="0"/>
-                <a:ea typeface="Roboto" panose="02000000000000000000" pitchFamily="2" charset="0"/>
-                <a:cs typeface="Roboto" panose="02000000000000000000" pitchFamily="2" charset="0"/>
-              </a:rPr>
-              <a:t>адреса с помощью конструкции </a:t>
+              <a:t>Применяются </a:t>
             </a:r>
             <a:r>
               <a:rPr lang="en-US" dirty="0">
@@ -14665,7 +15130,7 @@
                 <a:ea typeface="Roboto" panose="02000000000000000000" pitchFamily="2" charset="0"/>
                 <a:cs typeface="Courier New" panose="02070309020205020404" pitchFamily="49" charset="0"/>
               </a:rPr>
-              <a:t>neighbor interface</a:t>
+              <a:t>peer-group</a:t>
             </a:r>
             <a:r>
               <a:rPr lang="en-US" dirty="0">
@@ -14673,7 +15138,7 @@
                 <a:ea typeface="Roboto" panose="02000000000000000000" pitchFamily="2" charset="0"/>
                 <a:cs typeface="Roboto" panose="02000000000000000000" pitchFamily="2" charset="0"/>
               </a:rPr>
-              <a:t>, </a:t>
+              <a:t> (SPINE, LEAFS, LEAFS-EVPN) </a:t>
             </a:r>
             <a:r>
               <a:rPr lang="ru-RU" dirty="0">
@@ -14681,242 +15146,8 @@
                 <a:ea typeface="Roboto" panose="02000000000000000000" pitchFamily="2" charset="0"/>
                 <a:cs typeface="Roboto" panose="02000000000000000000" pitchFamily="2" charset="0"/>
               </a:rPr>
-              <a:t>что </a:t>
-            </a:r>
-            <a:r>
-              <a:rPr lang="ru-RU" dirty="0" err="1">
-                <a:latin typeface="Roboto" panose="02000000000000000000" pitchFamily="2" charset="0"/>
-                <a:ea typeface="Roboto" panose="02000000000000000000" pitchFamily="2" charset="0"/>
-                <a:cs typeface="Roboto" panose="02000000000000000000" pitchFamily="2" charset="0"/>
-              </a:rPr>
-              <a:t>полность</a:t>
-            </a:r>
-            <a:r>
-              <a:rPr lang="ru-RU" dirty="0">
-                <a:latin typeface="Roboto" panose="02000000000000000000" pitchFamily="2" charset="0"/>
-                <a:ea typeface="Roboto" panose="02000000000000000000" pitchFamily="2" charset="0"/>
-                <a:cs typeface="Roboto" panose="02000000000000000000" pitchFamily="2" charset="0"/>
-              </a:rPr>
-              <a:t> ю исключает необходимость назначения </a:t>
-            </a:r>
-            <a:r>
-              <a:rPr lang="en-US" dirty="0">
-                <a:latin typeface="Roboto" panose="02000000000000000000" pitchFamily="2" charset="0"/>
-                <a:ea typeface="Roboto" panose="02000000000000000000" pitchFamily="2" charset="0"/>
-                <a:cs typeface="Roboto" panose="02000000000000000000" pitchFamily="2" charset="0"/>
-              </a:rPr>
-              <a:t>IP-</a:t>
-            </a:r>
-            <a:r>
-              <a:rPr lang="ru-RU" dirty="0">
-                <a:latin typeface="Roboto" panose="02000000000000000000" pitchFamily="2" charset="0"/>
-                <a:ea typeface="Roboto" panose="02000000000000000000" pitchFamily="2" charset="0"/>
-                <a:cs typeface="Roboto" panose="02000000000000000000" pitchFamily="2" charset="0"/>
-              </a:rPr>
-              <a:t>адресов на </a:t>
-            </a:r>
-            <a:r>
-              <a:rPr lang="en-US" dirty="0">
-                <a:latin typeface="Roboto" panose="02000000000000000000" pitchFamily="2" charset="0"/>
-                <a:ea typeface="Roboto" panose="02000000000000000000" pitchFamily="2" charset="0"/>
-                <a:cs typeface="Roboto" panose="02000000000000000000" pitchFamily="2" charset="0"/>
-              </a:rPr>
-              <a:t>P2P-</a:t>
-            </a:r>
-            <a:r>
-              <a:rPr lang="ru-RU" dirty="0">
-                <a:latin typeface="Roboto" panose="02000000000000000000" pitchFamily="2" charset="0"/>
-                <a:ea typeface="Roboto" panose="02000000000000000000" pitchFamily="2" charset="0"/>
-                <a:cs typeface="Roboto" panose="02000000000000000000" pitchFamily="2" charset="0"/>
-              </a:rPr>
-              <a:t>линки.</a:t>
-            </a:r>
-          </a:p>
-          <a:p>
-            <a:pPr marL="285750" indent="-285750">
-              <a:buFont typeface="Arial" panose="020B0604020202020204" pitchFamily="34" charset="0"/>
-              <a:buChar char="•"/>
-            </a:pPr>
-            <a:r>
-              <a:rPr lang="ru-RU" dirty="0">
-                <a:latin typeface="Roboto" panose="02000000000000000000" pitchFamily="2" charset="0"/>
-                <a:ea typeface="Roboto" panose="02000000000000000000" pitchFamily="2" charset="0"/>
-                <a:cs typeface="Roboto" panose="02000000000000000000" pitchFamily="2" charset="0"/>
-              </a:rPr>
-              <a:t>Применяются </a:t>
-            </a:r>
-            <a:r>
-              <a:rPr lang="en-US" dirty="0">
-                <a:latin typeface="Courier New" panose="02070309020205020404" pitchFamily="49" charset="0"/>
-                <a:ea typeface="Roboto" panose="02000000000000000000" pitchFamily="2" charset="0"/>
-                <a:cs typeface="Courier New" panose="02070309020205020404" pitchFamily="49" charset="0"/>
-              </a:rPr>
-              <a:t>peer-group</a:t>
-            </a:r>
-            <a:r>
-              <a:rPr lang="en-US" dirty="0">
-                <a:latin typeface="Roboto" panose="02000000000000000000" pitchFamily="2" charset="0"/>
-                <a:ea typeface="Roboto" panose="02000000000000000000" pitchFamily="2" charset="0"/>
-                <a:cs typeface="Roboto" panose="02000000000000000000" pitchFamily="2" charset="0"/>
-              </a:rPr>
-              <a:t> (</a:t>
-            </a:r>
-            <a:r>
-              <a:rPr lang="en-US" dirty="0" err="1">
-                <a:latin typeface="Roboto" panose="02000000000000000000" pitchFamily="2" charset="0"/>
-                <a:ea typeface="Roboto" panose="02000000000000000000" pitchFamily="2" charset="0"/>
-                <a:cs typeface="Roboto" panose="02000000000000000000" pitchFamily="2" charset="0"/>
-              </a:rPr>
-              <a:t>pg_SPINE</a:t>
-            </a:r>
-            <a:r>
-              <a:rPr lang="en-US" dirty="0">
-                <a:latin typeface="Roboto" panose="02000000000000000000" pitchFamily="2" charset="0"/>
-                <a:ea typeface="Roboto" panose="02000000000000000000" pitchFamily="2" charset="0"/>
-                <a:cs typeface="Roboto" panose="02000000000000000000" pitchFamily="2" charset="0"/>
-              </a:rPr>
-              <a:t>, </a:t>
-            </a:r>
-            <a:r>
-              <a:rPr lang="en-US" dirty="0" err="1">
-                <a:latin typeface="Roboto" panose="02000000000000000000" pitchFamily="2" charset="0"/>
-                <a:ea typeface="Roboto" panose="02000000000000000000" pitchFamily="2" charset="0"/>
-                <a:cs typeface="Roboto" panose="02000000000000000000" pitchFamily="2" charset="0"/>
-              </a:rPr>
-              <a:t>pg_LIAF</a:t>
-            </a:r>
-            <a:r>
-              <a:rPr lang="en-US" dirty="0">
-                <a:latin typeface="Roboto" panose="02000000000000000000" pitchFamily="2" charset="0"/>
-                <a:ea typeface="Roboto" panose="02000000000000000000" pitchFamily="2" charset="0"/>
-                <a:cs typeface="Roboto" panose="02000000000000000000" pitchFamily="2" charset="0"/>
-              </a:rPr>
-              <a:t>) </a:t>
-            </a:r>
-            <a:r>
-              <a:rPr lang="ru-RU" dirty="0">
-                <a:latin typeface="Roboto" panose="02000000000000000000" pitchFamily="2" charset="0"/>
-                <a:ea typeface="Roboto" panose="02000000000000000000" pitchFamily="2" charset="0"/>
-                <a:cs typeface="Roboto" panose="02000000000000000000" pitchFamily="2" charset="0"/>
-              </a:rPr>
               <a:t>для унификации настроек и упрощения конфигурации.</a:t>
             </a:r>
-          </a:p>
-          <a:p>
-            <a:pPr marL="285750" indent="-285750">
-              <a:buFont typeface="Arial" panose="020B0604020202020204" pitchFamily="34" charset="0"/>
-              <a:buChar char="•"/>
-            </a:pPr>
-            <a:r>
-              <a:rPr lang="ru-RU" dirty="0">
-                <a:latin typeface="Roboto" panose="02000000000000000000" pitchFamily="2" charset="0"/>
-                <a:ea typeface="Roboto" panose="02000000000000000000" pitchFamily="2" charset="0"/>
-                <a:cs typeface="Roboto" panose="02000000000000000000" pitchFamily="2" charset="0"/>
-              </a:rPr>
-              <a:t>В </a:t>
-            </a:r>
-            <a:r>
-              <a:rPr lang="en-US" dirty="0">
-                <a:latin typeface="Roboto" panose="02000000000000000000" pitchFamily="2" charset="0"/>
-                <a:ea typeface="Roboto" panose="02000000000000000000" pitchFamily="2" charset="0"/>
-                <a:cs typeface="Roboto" panose="02000000000000000000" pitchFamily="2" charset="0"/>
-              </a:rPr>
-              <a:t>address-family IPv4 </a:t>
-            </a:r>
-            <a:r>
-              <a:rPr lang="ru-RU" dirty="0">
-                <a:latin typeface="Roboto" panose="02000000000000000000" pitchFamily="2" charset="0"/>
-                <a:ea typeface="Roboto" panose="02000000000000000000" pitchFamily="2" charset="0"/>
-                <a:cs typeface="Roboto" panose="02000000000000000000" pitchFamily="2" charset="0"/>
-              </a:rPr>
-              <a:t>активированы соседи с опциями:</a:t>
-            </a:r>
-          </a:p>
-          <a:p>
-            <a:pPr lvl="4"/>
-            <a:r>
-              <a:rPr lang="ru-RU" dirty="0">
-                <a:latin typeface="Roboto" panose="02000000000000000000" pitchFamily="2" charset="0"/>
-                <a:ea typeface="Roboto" panose="02000000000000000000" pitchFamily="2" charset="0"/>
-                <a:cs typeface="Roboto" panose="02000000000000000000" pitchFamily="2" charset="0"/>
-              </a:rPr>
-              <a:t>	</a:t>
-            </a:r>
-            <a:r>
-              <a:rPr lang="en-US" dirty="0">
-                <a:latin typeface="Courier New" panose="02070309020205020404" pitchFamily="49" charset="0"/>
-                <a:ea typeface="Roboto" panose="02000000000000000000" pitchFamily="2" charset="0"/>
-                <a:cs typeface="Courier New" panose="02070309020205020404" pitchFamily="49" charset="0"/>
-              </a:rPr>
-              <a:t>next-hop address-family ipv6 originate </a:t>
-            </a:r>
-            <a:r>
-              <a:rPr lang="en-US" dirty="0">
-                <a:latin typeface="Roboto" panose="02000000000000000000" pitchFamily="2" charset="0"/>
-                <a:ea typeface="Roboto" panose="02000000000000000000" pitchFamily="2" charset="0"/>
-                <a:cs typeface="Roboto" panose="02000000000000000000" pitchFamily="2" charset="0"/>
-              </a:rPr>
-              <a:t>— </a:t>
-            </a:r>
-            <a:r>
-              <a:rPr lang="ru-RU" dirty="0">
-                <a:latin typeface="Roboto" panose="02000000000000000000" pitchFamily="2" charset="0"/>
-                <a:ea typeface="Roboto" panose="02000000000000000000" pitchFamily="2" charset="0"/>
-                <a:cs typeface="Roboto" panose="02000000000000000000" pitchFamily="2" charset="0"/>
-              </a:rPr>
-              <a:t>следующий хоп передаётся 	как </a:t>
-            </a:r>
-            <a:r>
-              <a:rPr lang="en-US" dirty="0">
-                <a:latin typeface="Roboto" panose="02000000000000000000" pitchFamily="2" charset="0"/>
-                <a:ea typeface="Roboto" panose="02000000000000000000" pitchFamily="2" charset="0"/>
-                <a:cs typeface="Roboto" panose="02000000000000000000" pitchFamily="2" charset="0"/>
-              </a:rPr>
-              <a:t>IPv6-</a:t>
-            </a:r>
-            <a:r>
-              <a:rPr lang="ru-RU" dirty="0">
-                <a:latin typeface="Roboto" panose="02000000000000000000" pitchFamily="2" charset="0"/>
-                <a:ea typeface="Roboto" panose="02000000000000000000" pitchFamily="2" charset="0"/>
-                <a:cs typeface="Roboto" panose="02000000000000000000" pitchFamily="2" charset="0"/>
-              </a:rPr>
-              <a:t>адрес;</a:t>
-            </a:r>
-          </a:p>
-          <a:p>
-            <a:r>
-              <a:rPr lang="ru-RU" dirty="0">
-                <a:latin typeface="Roboto" panose="02000000000000000000" pitchFamily="2" charset="0"/>
-                <a:ea typeface="Roboto" panose="02000000000000000000" pitchFamily="2" charset="0"/>
-                <a:cs typeface="Roboto" panose="02000000000000000000" pitchFamily="2" charset="0"/>
-              </a:rPr>
-              <a:t>	</a:t>
-            </a:r>
-            <a:r>
-              <a:rPr lang="en-US" dirty="0">
-                <a:latin typeface="Courier New" panose="02070309020205020404" pitchFamily="49" charset="0"/>
-                <a:ea typeface="Roboto" panose="02000000000000000000" pitchFamily="2" charset="0"/>
-                <a:cs typeface="Courier New" panose="02070309020205020404" pitchFamily="49" charset="0"/>
-              </a:rPr>
-              <a:t>next-hop-self</a:t>
-            </a:r>
-            <a:r>
-              <a:rPr lang="en-US" dirty="0">
-                <a:latin typeface="Roboto" panose="02000000000000000000" pitchFamily="2" charset="0"/>
-                <a:ea typeface="Roboto" panose="02000000000000000000" pitchFamily="2" charset="0"/>
-                <a:cs typeface="Roboto" panose="02000000000000000000" pitchFamily="2" charset="0"/>
-              </a:rPr>
-              <a:t> — Leaf </a:t>
-            </a:r>
-            <a:r>
-              <a:rPr lang="ru-RU" dirty="0">
-                <a:latin typeface="Roboto" panose="02000000000000000000" pitchFamily="2" charset="0"/>
-                <a:ea typeface="Roboto" panose="02000000000000000000" pitchFamily="2" charset="0"/>
-                <a:cs typeface="Roboto" panose="02000000000000000000" pitchFamily="2" charset="0"/>
-              </a:rPr>
-              <a:t>анонсирует себя как следующий хоп для достижения 	клиентских сетей.</a:t>
-            </a:r>
-            <a:endParaRPr lang="ru-RU" dirty="0"/>
           </a:p>
         </p:txBody>
       </p:sp>
@@ -14934,7 +15165,7 @@
         </p:nvSpPr>
         <p:spPr>
           <a:xfrm>
-            <a:off x="419005" y="3641546"/>
+            <a:off x="495747" y="2042481"/>
             <a:ext cx="8152505" cy="646331"/>
           </a:xfrm>
           <a:prstGeom prst="rect">
@@ -15044,7 +15275,7 @@
         </p:nvSpPr>
         <p:spPr>
           <a:xfrm>
-            <a:off x="892884" y="4052673"/>
+            <a:off x="601531" y="2673121"/>
             <a:ext cx="8046721" cy="738664"/>
           </a:xfrm>
           <a:prstGeom prst="rect">
@@ -15068,7 +15299,103 @@
                 <a:ea typeface="Roboto" panose="02000000000000000000" pitchFamily="2" charset="0"/>
                 <a:cs typeface="Roboto" panose="02000000000000000000" pitchFamily="2" charset="0"/>
               </a:rPr>
-              <a:t>Каждое устройство имеет Loopback0 с адресом /32 (например, 10.1.0.1 для Leaf-1-1, 10.1.1.1 для Spine-1-1).</a:t>
+              <a:t>Каждое устройство имеет Loopback0 с адресом /32 (например, 1.1.</a:t>
+            </a:r>
+            <a:r>
+              <a:rPr lang="en-US" dirty="0">
+                <a:latin typeface="Roboto" panose="02000000000000000000" pitchFamily="2" charset="0"/>
+                <a:ea typeface="Roboto" panose="02000000000000000000" pitchFamily="2" charset="0"/>
+                <a:cs typeface="Roboto" panose="02000000000000000000" pitchFamily="2" charset="0"/>
+              </a:rPr>
+              <a:t>1</a:t>
+            </a:r>
+            <a:r>
+              <a:rPr lang="ru-RU" dirty="0">
+                <a:latin typeface="Roboto" panose="02000000000000000000" pitchFamily="2" charset="0"/>
+                <a:ea typeface="Roboto" panose="02000000000000000000" pitchFamily="2" charset="0"/>
+                <a:cs typeface="Roboto" panose="02000000000000000000" pitchFamily="2" charset="0"/>
+              </a:rPr>
+              <a:t>.1 для </a:t>
+            </a:r>
+            <a:r>
+              <a:rPr lang="ru-RU" dirty="0" err="1">
+                <a:latin typeface="Roboto" panose="02000000000000000000" pitchFamily="2" charset="0"/>
+                <a:ea typeface="Roboto" panose="02000000000000000000" pitchFamily="2" charset="0"/>
+                <a:cs typeface="Roboto" panose="02000000000000000000" pitchFamily="2" charset="0"/>
+              </a:rPr>
+              <a:t>Leaf</a:t>
+            </a:r>
+            <a:r>
+              <a:rPr lang="en-US" dirty="0">
+                <a:latin typeface="Roboto" panose="02000000000000000000" pitchFamily="2" charset="0"/>
+                <a:ea typeface="Roboto" panose="02000000000000000000" pitchFamily="2" charset="0"/>
+                <a:cs typeface="Roboto" panose="02000000000000000000" pitchFamily="2" charset="0"/>
+              </a:rPr>
+              <a:t>1-s1</a:t>
+            </a:r>
+            <a:r>
+              <a:rPr lang="ru-RU" dirty="0">
+                <a:latin typeface="Roboto" panose="02000000000000000000" pitchFamily="2" charset="0"/>
+                <a:ea typeface="Roboto" panose="02000000000000000000" pitchFamily="2" charset="0"/>
+                <a:cs typeface="Roboto" panose="02000000000000000000" pitchFamily="2" charset="0"/>
+              </a:rPr>
+              <a:t>, </a:t>
+            </a:r>
+            <a:r>
+              <a:rPr lang="en-US" dirty="0">
+                <a:latin typeface="Roboto" panose="02000000000000000000" pitchFamily="2" charset="0"/>
+                <a:ea typeface="Roboto" panose="02000000000000000000" pitchFamily="2" charset="0"/>
+                <a:cs typeface="Roboto" panose="02000000000000000000" pitchFamily="2" charset="0"/>
+              </a:rPr>
+              <a:t>2</a:t>
+            </a:r>
+            <a:r>
+              <a:rPr lang="ru-RU" dirty="0">
+                <a:latin typeface="Roboto" panose="02000000000000000000" pitchFamily="2" charset="0"/>
+                <a:ea typeface="Roboto" panose="02000000000000000000" pitchFamily="2" charset="0"/>
+                <a:cs typeface="Roboto" panose="02000000000000000000" pitchFamily="2" charset="0"/>
+              </a:rPr>
+              <a:t>.</a:t>
+            </a:r>
+            <a:r>
+              <a:rPr lang="en-US" dirty="0">
+                <a:latin typeface="Roboto" panose="02000000000000000000" pitchFamily="2" charset="0"/>
+                <a:ea typeface="Roboto" panose="02000000000000000000" pitchFamily="2" charset="0"/>
+                <a:cs typeface="Roboto" panose="02000000000000000000" pitchFamily="2" charset="0"/>
+              </a:rPr>
+              <a:t>111.111.111</a:t>
+            </a:r>
+            <a:r>
+              <a:rPr lang="ru-RU" dirty="0">
+                <a:latin typeface="Roboto" panose="02000000000000000000" pitchFamily="2" charset="0"/>
+                <a:ea typeface="Roboto" panose="02000000000000000000" pitchFamily="2" charset="0"/>
+                <a:cs typeface="Roboto" panose="02000000000000000000" pitchFamily="2" charset="0"/>
+              </a:rPr>
+              <a:t> для </a:t>
+            </a:r>
+            <a:r>
+              <a:rPr lang="ru-RU" dirty="0" err="1">
+                <a:latin typeface="Roboto" panose="02000000000000000000" pitchFamily="2" charset="0"/>
+                <a:ea typeface="Roboto" panose="02000000000000000000" pitchFamily="2" charset="0"/>
+                <a:cs typeface="Roboto" panose="02000000000000000000" pitchFamily="2" charset="0"/>
+              </a:rPr>
+              <a:t>Spine</a:t>
+            </a:r>
+            <a:r>
+              <a:rPr lang="en-US" dirty="0">
+                <a:latin typeface="Roboto" panose="02000000000000000000" pitchFamily="2" charset="0"/>
+                <a:ea typeface="Roboto" panose="02000000000000000000" pitchFamily="2" charset="0"/>
+                <a:cs typeface="Roboto" panose="02000000000000000000" pitchFamily="2" charset="0"/>
+              </a:rPr>
+              <a:t>1-s2</a:t>
+            </a:r>
+            <a:r>
+              <a:rPr lang="ru-RU" dirty="0">
+                <a:latin typeface="Roboto" panose="02000000000000000000" pitchFamily="2" charset="0"/>
+                <a:ea typeface="Roboto" panose="02000000000000000000" pitchFamily="2" charset="0"/>
+                <a:cs typeface="Roboto" panose="02000000000000000000" pitchFamily="2" charset="0"/>
+              </a:rPr>
+              <a:t>).</a:t>
             </a:r>
           </a:p>
           <a:p>
@@ -15093,12 +15420,20 @@
               <a:t>адреса анонсируются в </a:t>
             </a:r>
             <a:r>
+              <a:rPr lang="en-US" dirty="0" err="1">
+                <a:latin typeface="Roboto" panose="02000000000000000000" pitchFamily="2" charset="0"/>
+                <a:ea typeface="Roboto" panose="02000000000000000000" pitchFamily="2" charset="0"/>
+                <a:cs typeface="Roboto" panose="02000000000000000000" pitchFamily="2" charset="0"/>
+              </a:rPr>
+              <a:t>eBGP</a:t>
+            </a:r>
+            <a:r>
               <a:rPr lang="en-US" dirty="0">
                 <a:latin typeface="Roboto" panose="02000000000000000000" pitchFamily="2" charset="0"/>
                 <a:ea typeface="Roboto" panose="02000000000000000000" pitchFamily="2" charset="0"/>
                 <a:cs typeface="Roboto" panose="02000000000000000000" pitchFamily="2" charset="0"/>
               </a:rPr>
-              <a:t>iBGP </a:t>
+              <a:t> </a:t>
             </a:r>
             <a:r>
               <a:rPr lang="ru-RU" dirty="0">
@@ -15217,7 +15552,12 @@
             <p:ph type="body" idx="1"/>
           </p:nvPr>
         </p:nvSpPr>
-        <p:spPr/>
+        <p:spPr>
+          <a:xfrm>
+            <a:off x="500550" y="1426469"/>
+            <a:ext cx="8240250" cy="1914331"/>
+          </a:xfrm>
+        </p:spPr>
         <p:txBody>
           <a:bodyPr/>
           <a:lstStyle/>
@@ -15234,50 +15574,6 @@
           <a:p>
             <a:r>
               <a:rPr lang="ru-RU" b="1" dirty="0"/>
-              <a:t>Экономия адресного пространства</a:t>
-            </a:r>
-            <a:r>
-              <a:rPr lang="ru-RU" dirty="0"/>
-              <a:t> — не тратятся ценные IPv4-адреса на транзитные линки.</a:t>
-            </a:r>
-          </a:p>
-          <a:p>
-            <a:r>
-              <a:rPr lang="ru-RU" b="1" dirty="0"/>
-              <a:t>Масштабируемость</a:t>
-            </a:r>
-            <a:r>
-              <a:rPr lang="ru-RU" dirty="0"/>
-              <a:t> — добавление новых </a:t>
-            </a:r>
-            <a:r>
-              <a:rPr lang="ru-RU" dirty="0" err="1"/>
-              <a:t>Leaf</a:t>
-            </a:r>
-            <a:r>
-              <a:rPr lang="ru-RU" dirty="0"/>
-              <a:t> не требует переконфигурации </a:t>
-            </a:r>
-            <a:r>
-              <a:rPr lang="ru-RU" dirty="0" err="1"/>
-              <a:t>Spine</a:t>
-            </a:r>
-            <a:r>
-              <a:rPr lang="ru-RU" dirty="0"/>
-              <a:t> (BGP сам устанавливает соседства по </a:t>
-            </a:r>
-            <a:r>
-              <a:rPr lang="ru-RU" dirty="0" err="1"/>
-              <a:t>link-local</a:t>
-            </a:r>
-            <a:r>
-              <a:rPr lang="ru-RU" dirty="0"/>
-              <a:t> адресам)</a:t>
-            </a:r>
-          </a:p>
-          <a:p>
-            <a:r>
-              <a:rPr lang="ru-RU" b="1" dirty="0"/>
               <a:t>Отказоустойчивость</a:t>
             </a:r>
             <a:r>
@@ -15300,19 +15596,8 @@
             </a:r>
             <a:r>
               <a:rPr lang="ru-RU" dirty="0"/>
-              <a:t>-интерфейсы конфигурируются идентично, что идеально подходит для шаблонов автоматизации (</a:t>
-            </a:r>
-            <a:r>
-              <a:rPr lang="ru-RU" dirty="0" err="1"/>
-              <a:t>Ansible</a:t>
-            </a:r>
-            <a:r>
-              <a:rPr lang="ru-RU" dirty="0"/>
-              <a:t>).</a:t>
-            </a:r>
-          </a:p>
-          <a:p>
-            <a:endParaRPr lang="ru-RU" dirty="0"/>
+              <a:t>-интерфейсы конфигурируются идентично</a:t>
+            </a:r>
           </a:p>
         </p:txBody>
       </p:sp>
@@ -15417,7 +15702,7 @@
         <p:spPr>
           <a:xfrm>
             <a:off x="742278" y="930008"/>
-            <a:ext cx="8046720" cy="2246769"/>
+            <a:ext cx="8046720" cy="2677656"/>
           </a:xfrm>
           <a:prstGeom prst="rect">
             <a:avLst/>
@@ -15451,7 +15736,15 @@
                 <a:ea typeface="Roboto" panose="02000000000000000000" pitchFamily="2" charset="0"/>
                 <a:cs typeface="Roboto" panose="02000000000000000000" pitchFamily="2" charset="0"/>
               </a:rPr>
-              <a:t>VXLAN</a:t>
+              <a:t>VRF – </a:t>
+            </a:r>
+            <a:r>
+              <a:rPr lang="en-US" dirty="0" err="1">
+                <a:latin typeface="Roboto" panose="02000000000000000000" pitchFamily="2" charset="0"/>
+                <a:ea typeface="Roboto" panose="02000000000000000000" pitchFamily="2" charset="0"/>
+                <a:cs typeface="Roboto" panose="02000000000000000000" pitchFamily="2" charset="0"/>
+              </a:rPr>
+              <a:t>Vrf</a:t>
             </a:r>
             <a:r>
               <a:rPr lang="en-US" dirty="0">
@@ -15459,7 +15752,7 @@
                 <a:ea typeface="Roboto" panose="02000000000000000000" pitchFamily="2" charset="0"/>
                 <a:cs typeface="Roboto" panose="02000000000000000000" pitchFamily="2" charset="0"/>
               </a:rPr>
-              <a:t> - VXLAN-</a:t>
+              <a:t> VXLAN</a:t>
             </a:r>
             <a:r>
               <a:rPr lang="ru-RU" dirty="0">
@@ -15467,7 +15760,7 @@
                 <a:ea typeface="Roboto" panose="02000000000000000000" pitchFamily="2" charset="0"/>
                 <a:cs typeface="Roboto" panose="02000000000000000000" pitchFamily="2" charset="0"/>
               </a:rPr>
-              <a:t>туннели строятся между всеми </a:t>
+              <a:t>. В данной схеме рассматривается подключение к фабрике клиентских устройств, которые принадлежат единственному клиенту, т.е. юрлицу, в связи с этим они объединены в общий </a:t>
             </a:r>
             <a:r>
               <a:rPr lang="en-US" dirty="0">
@@ -15475,7 +15768,7 @@
                 <a:ea typeface="Roboto" panose="02000000000000000000" pitchFamily="2" charset="0"/>
                 <a:cs typeface="Roboto" panose="02000000000000000000" pitchFamily="2" charset="0"/>
               </a:rPr>
-              <a:t>Leaf-</a:t>
+              <a:t>VRF</a:t>
             </a:r>
             <a:r>
               <a:rPr lang="ru-RU" dirty="0">
@@ -15483,23 +15776,7 @@
                 <a:ea typeface="Roboto" panose="02000000000000000000" pitchFamily="2" charset="0"/>
                 <a:cs typeface="Roboto" panose="02000000000000000000" pitchFamily="2" charset="0"/>
               </a:rPr>
-              <a:t>коммутаторами фабрики. Источник — </a:t>
-            </a:r>
-            <a:r>
-              <a:rPr lang="en-US" dirty="0">
-                <a:latin typeface="Roboto" panose="02000000000000000000" pitchFamily="2" charset="0"/>
-                <a:ea typeface="Roboto" panose="02000000000000000000" pitchFamily="2" charset="0"/>
-                <a:cs typeface="Roboto" panose="02000000000000000000" pitchFamily="2" charset="0"/>
-              </a:rPr>
-              <a:t>Loopback0, UDP </a:t>
-            </a:r>
-            <a:r>
-              <a:rPr lang="ru-RU" dirty="0">
-                <a:latin typeface="Roboto" panose="02000000000000000000" pitchFamily="2" charset="0"/>
-                <a:ea typeface="Roboto" panose="02000000000000000000" pitchFamily="2" charset="0"/>
-                <a:cs typeface="Roboto" panose="02000000000000000000" pitchFamily="2" charset="0"/>
-              </a:rPr>
-              <a:t>порт 4789.</a:t>
+              <a:t>.</a:t>
             </a:r>
             <a:endParaRPr lang="en-US" dirty="0">
               <a:latin typeface="Roboto" panose="02000000000000000000" pitchFamily="2" charset="0"/>
@@ -15622,7 +15899,23 @@
                 <a:ea typeface="Roboto" panose="02000000000000000000" pitchFamily="2" charset="0"/>
                 <a:cs typeface="Roboto" panose="02000000000000000000" pitchFamily="2" charset="0"/>
               </a:rPr>
-              <a:t>VLAN 30.</a:t>
+              <a:t>VLAN 30</a:t>
+            </a:r>
+            <a:r>
+              <a:rPr lang="ru-RU" dirty="0">
+                <a:latin typeface="Roboto" panose="02000000000000000000" pitchFamily="2" charset="0"/>
+                <a:ea typeface="Roboto" panose="02000000000000000000" pitchFamily="2" charset="0"/>
+                <a:cs typeface="Roboto" panose="02000000000000000000" pitchFamily="2" charset="0"/>
+              </a:rPr>
+              <a:t> и так далее</a:t>
+            </a:r>
+            <a:r>
+              <a:rPr lang="en-US" dirty="0">
+                <a:latin typeface="Roboto" panose="02000000000000000000" pitchFamily="2" charset="0"/>
+                <a:ea typeface="Roboto" panose="02000000000000000000" pitchFamily="2" charset="0"/>
+                <a:cs typeface="Roboto" panose="02000000000000000000" pitchFamily="2" charset="0"/>
+              </a:rPr>
+              <a:t>.</a:t>
             </a:r>
           </a:p>
           <a:p>
@@ -15676,71 +15969,7 @@
                 <a:ea typeface="Roboto" panose="02000000000000000000" pitchFamily="2" charset="0"/>
                 <a:cs typeface="Roboto" panose="02000000000000000000" pitchFamily="2" charset="0"/>
               </a:rPr>
-              <a:t>VRF Tenant (</a:t>
-            </a:r>
-            <a:r>
-              <a:rPr lang="en-US" b="1" dirty="0">
-                <a:latin typeface="Roboto" panose="02000000000000000000" pitchFamily="2" charset="0"/>
-                <a:ea typeface="Roboto" panose="02000000000000000000" pitchFamily="2" charset="0"/>
-                <a:cs typeface="Roboto" panose="02000000000000000000" pitchFamily="2" charset="0"/>
-              </a:rPr>
-              <a:t>VRF</a:t>
-            </a:r>
-            <a:r>
-              <a:rPr lang="en-US" dirty="0">
-                <a:latin typeface="Roboto" panose="02000000000000000000" pitchFamily="2" charset="0"/>
-                <a:ea typeface="Roboto" panose="02000000000000000000" pitchFamily="2" charset="0"/>
-                <a:cs typeface="Roboto" panose="02000000000000000000" pitchFamily="2" charset="0"/>
-              </a:rPr>
-              <a:t> - VRF RED (</a:t>
-            </a:r>
-            <a:r>
-              <a:rPr lang="ru-RU" dirty="0">
-                <a:latin typeface="Roboto" panose="02000000000000000000" pitchFamily="2" charset="0"/>
-                <a:ea typeface="Roboto" panose="02000000000000000000" pitchFamily="2" charset="0"/>
-                <a:cs typeface="Roboto" panose="02000000000000000000" pitchFamily="2" charset="0"/>
-              </a:rPr>
-              <a:t>клиенты </a:t>
-            </a:r>
-            <a:r>
-              <a:rPr lang="en-US" dirty="0">
-                <a:latin typeface="Roboto" panose="02000000000000000000" pitchFamily="2" charset="0"/>
-                <a:ea typeface="Roboto" panose="02000000000000000000" pitchFamily="2" charset="0"/>
-                <a:cs typeface="Roboto" panose="02000000000000000000" pitchFamily="2" charset="0"/>
-              </a:rPr>
-              <a:t>VLAN10 </a:t>
-            </a:r>
-            <a:r>
-              <a:rPr lang="ru-RU" dirty="0">
-                <a:latin typeface="Roboto" panose="02000000000000000000" pitchFamily="2" charset="0"/>
-                <a:ea typeface="Roboto" panose="02000000000000000000" pitchFamily="2" charset="0"/>
-                <a:cs typeface="Roboto" panose="02000000000000000000" pitchFamily="2" charset="0"/>
-              </a:rPr>
-              <a:t>и </a:t>
-            </a:r>
-            <a:r>
-              <a:rPr lang="en-US" dirty="0">
-                <a:latin typeface="Roboto" panose="02000000000000000000" pitchFamily="2" charset="0"/>
-                <a:ea typeface="Roboto" panose="02000000000000000000" pitchFamily="2" charset="0"/>
-                <a:cs typeface="Roboto" panose="02000000000000000000" pitchFamily="2" charset="0"/>
-              </a:rPr>
-              <a:t>VLAN20), VRF BLUE (</a:t>
-            </a:r>
-            <a:r>
-              <a:rPr lang="ru-RU" dirty="0">
-                <a:latin typeface="Roboto" panose="02000000000000000000" pitchFamily="2" charset="0"/>
-                <a:ea typeface="Roboto" panose="02000000000000000000" pitchFamily="2" charset="0"/>
-                <a:cs typeface="Roboto" panose="02000000000000000000" pitchFamily="2" charset="0"/>
-              </a:rPr>
-              <a:t>клиент </a:t>
-            </a:r>
-            <a:r>
-              <a:rPr lang="en-US" dirty="0">
-                <a:latin typeface="Roboto" panose="02000000000000000000" pitchFamily="2" charset="0"/>
-                <a:ea typeface="Roboto" panose="02000000000000000000" pitchFamily="2" charset="0"/>
-                <a:cs typeface="Roboto" panose="02000000000000000000" pitchFamily="2" charset="0"/>
-              </a:rPr>
-              <a:t>VLAN30).</a:t>
+              <a:t>VRF VXLAN</a:t>
             </a:r>
           </a:p>
           <a:p>
@@ -15770,7 +15999,7 @@
                 <a:ea typeface="Roboto" panose="02000000000000000000" pitchFamily="2" charset="0"/>
                 <a:cs typeface="Roboto" panose="02000000000000000000" pitchFamily="2" charset="0"/>
               </a:rPr>
-              <a:t>На каждом </a:t>
+              <a:t>В данной схеме мы предполагаем, что время отсутствия сервиса крайне критично для приложений, расположенных на </a:t>
             </a:r>
             <a:r>
               <a:rPr lang="en-US" dirty="0">
@@ -15778,7 +16007,7 @@
                 <a:ea typeface="Roboto" panose="02000000000000000000" pitchFamily="2" charset="0"/>
                 <a:cs typeface="Roboto" panose="02000000000000000000" pitchFamily="2" charset="0"/>
               </a:rPr>
-              <a:t>Leaf: SVI </a:t>
+              <a:t>Ce1-s1, Ce2-s1, Ce1-s2, Ce2-s2</a:t>
             </a:r>
             <a:r>
               <a:rPr lang="ru-RU" dirty="0">
@@ -15786,6 +16015,38 @@
                 <a:ea typeface="Roboto" panose="02000000000000000000" pitchFamily="2" charset="0"/>
                 <a:cs typeface="Roboto" panose="02000000000000000000" pitchFamily="2" charset="0"/>
               </a:rPr>
+              <a:t>. В связи с этим, схема резервирования Настроена на </a:t>
+            </a:r>
+            <a:r>
+              <a:rPr lang="en-US" dirty="0">
+                <a:latin typeface="Roboto" panose="02000000000000000000" pitchFamily="2" charset="0"/>
+                <a:ea typeface="Roboto" panose="02000000000000000000" pitchFamily="2" charset="0"/>
+                <a:cs typeface="Roboto" panose="02000000000000000000" pitchFamily="2" charset="0"/>
+              </a:rPr>
+              <a:t>Leaf1-s1+Leaf2-s1</a:t>
+            </a:r>
+            <a:r>
+              <a:rPr lang="ru-RU" dirty="0">
+                <a:latin typeface="Roboto" panose="02000000000000000000" pitchFamily="2" charset="0"/>
+                <a:ea typeface="Roboto" panose="02000000000000000000" pitchFamily="2" charset="0"/>
+                <a:cs typeface="Roboto" panose="02000000000000000000" pitchFamily="2" charset="0"/>
+              </a:rPr>
+              <a:t> и на</a:t>
+            </a:r>
+            <a:r>
+              <a:rPr lang="en-US" dirty="0">
+                <a:latin typeface="Roboto" panose="02000000000000000000" pitchFamily="2" charset="0"/>
+                <a:ea typeface="Roboto" panose="02000000000000000000" pitchFamily="2" charset="0"/>
+                <a:cs typeface="Roboto" panose="02000000000000000000" pitchFamily="2" charset="0"/>
+              </a:rPr>
+              <a:t> Leaf2-s1+Leaf2-s2: SVI </a:t>
+            </a:r>
+            <a:r>
+              <a:rPr lang="ru-RU" dirty="0">
+                <a:latin typeface="Roboto" panose="02000000000000000000" pitchFamily="2" charset="0"/>
+                <a:ea typeface="Roboto" panose="02000000000000000000" pitchFamily="2" charset="0"/>
+                <a:cs typeface="Roboto" panose="02000000000000000000" pitchFamily="2" charset="0"/>
+              </a:rPr>
               <a:t>с одинаковым </a:t>
             </a:r>
             <a:r>
@@ -15818,7 +16079,7 @@
                 <a:ea typeface="Roboto" panose="02000000000000000000" pitchFamily="2" charset="0"/>
                 <a:cs typeface="Roboto" panose="02000000000000000000" pitchFamily="2" charset="0"/>
               </a:rPr>
-              <a:t>адресом 02:00:00:00:00:00</a:t>
+              <a:t>адресом </a:t>
             </a:r>
           </a:p>
           <a:p>
